--- a/Project-Complete docs/Synopsis Presentation.pptx
+++ b/Project-Complete docs/Synopsis Presentation.pptx
@@ -5,19 +5,26 @@
     <p:sldMasterId id="2147483696" r:id="rId1"/>
   </p:sldMasterIdLst>
   <p:notesMasterIdLst>
-    <p:notesMasterId r:id="rId12"/>
+    <p:notesMasterId r:id="rId19"/>
   </p:notesMasterIdLst>
   <p:sldIdLst>
     <p:sldId id="256" r:id="rId2"/>
     <p:sldId id="266" r:id="rId3"/>
     <p:sldId id="257" r:id="rId4"/>
-    <p:sldId id="259" r:id="rId5"/>
-    <p:sldId id="264" r:id="rId6"/>
-    <p:sldId id="261" r:id="rId7"/>
-    <p:sldId id="260" r:id="rId8"/>
-    <p:sldId id="265" r:id="rId9"/>
-    <p:sldId id="262" r:id="rId10"/>
-    <p:sldId id="268" r:id="rId11"/>
+    <p:sldId id="269" r:id="rId5"/>
+    <p:sldId id="259" r:id="rId6"/>
+    <p:sldId id="264" r:id="rId7"/>
+    <p:sldId id="261" r:id="rId8"/>
+    <p:sldId id="260" r:id="rId9"/>
+    <p:sldId id="265" r:id="rId10"/>
+    <p:sldId id="271" r:id="rId11"/>
+    <p:sldId id="275" r:id="rId12"/>
+    <p:sldId id="274" r:id="rId13"/>
+    <p:sldId id="272" r:id="rId14"/>
+    <p:sldId id="273" r:id="rId15"/>
+    <p:sldId id="262" r:id="rId16"/>
+    <p:sldId id="270" r:id="rId17"/>
+    <p:sldId id="268" r:id="rId18"/>
   </p:sldIdLst>
   <p:sldSz cx="12192000" cy="6858000"/>
   <p:notesSz cx="6858000" cy="9144000"/>
@@ -206,7 +213,7 @@
           <a:p>
             <a:fld id="{DDBD07C2-A8D5-442F-93E7-71925FF71000}" type="datetimeFigureOut">
               <a:rPr lang="en-IN" smtClean="0"/>
-              <a:t>07-01-2026</a:t>
+              <a:t>08-01-2026</a:t>
             </a:fld>
             <a:endParaRPr lang="en-IN"/>
           </a:p>
@@ -689,7 +696,7 @@
           <a:p>
             <a:fld id="{93FE507B-74E9-434B-B589-61639C269BD2}" type="datetime1">
               <a:rPr lang="en-IN" smtClean="0"/>
-              <a:t>07-01-2026</a:t>
+              <a:t>08-01-2026</a:t>
             </a:fld>
             <a:endParaRPr lang="en-IN"/>
           </a:p>
@@ -859,7 +866,7 @@
           <a:p>
             <a:fld id="{1DF852E4-941D-4D93-8BE7-96DFDEB218D4}" type="datetime1">
               <a:rPr lang="en-IN" smtClean="0"/>
-              <a:t>07-01-2026</a:t>
+              <a:t>08-01-2026</a:t>
             </a:fld>
             <a:endParaRPr lang="en-IN"/>
           </a:p>
@@ -1039,7 +1046,7 @@
           <a:p>
             <a:fld id="{B713C6D0-628E-4C8C-B674-0FC5911BFD3F}" type="datetime1">
               <a:rPr lang="en-IN" smtClean="0"/>
-              <a:t>07-01-2026</a:t>
+              <a:t>08-01-2026</a:t>
             </a:fld>
             <a:endParaRPr lang="en-IN"/>
           </a:p>
@@ -1209,7 +1216,7 @@
           <a:p>
             <a:fld id="{02C27CEE-AECC-488D-B081-6669003DE492}" type="datetime1">
               <a:rPr lang="en-IN" smtClean="0"/>
-              <a:t>07-01-2026</a:t>
+              <a:t>08-01-2026</a:t>
             </a:fld>
             <a:endParaRPr lang="en-IN"/>
           </a:p>
@@ -1455,7 +1462,7 @@
           <a:p>
             <a:fld id="{5F907550-43C7-482D-BA34-265D3A59D17F}" type="datetime1">
               <a:rPr lang="en-IN" smtClean="0"/>
-              <a:t>07-01-2026</a:t>
+              <a:t>08-01-2026</a:t>
             </a:fld>
             <a:endParaRPr lang="en-IN"/>
           </a:p>
@@ -1687,7 +1694,7 @@
           <a:p>
             <a:fld id="{94D77DB3-F920-470E-B309-869FDF9C0108}" type="datetime1">
               <a:rPr lang="en-IN" smtClean="0"/>
-              <a:t>07-01-2026</a:t>
+              <a:t>08-01-2026</a:t>
             </a:fld>
             <a:endParaRPr lang="en-IN"/>
           </a:p>
@@ -2054,7 +2061,7 @@
           <a:p>
             <a:fld id="{5B45A2ED-077A-4579-A46A-43231F0F597B}" type="datetime1">
               <a:rPr lang="en-IN" smtClean="0"/>
-              <a:t>07-01-2026</a:t>
+              <a:t>08-01-2026</a:t>
             </a:fld>
             <a:endParaRPr lang="en-IN"/>
           </a:p>
@@ -2172,7 +2179,7 @@
           <a:p>
             <a:fld id="{485FFD98-AA31-4581-BF2A-5A2077300591}" type="datetime1">
               <a:rPr lang="en-IN" smtClean="0"/>
-              <a:t>07-01-2026</a:t>
+              <a:t>08-01-2026</a:t>
             </a:fld>
             <a:endParaRPr lang="en-IN"/>
           </a:p>
@@ -2267,7 +2274,7 @@
           <a:p>
             <a:fld id="{4058E697-6A5A-41D6-A5BF-DF6DC04A6DFC}" type="datetime1">
               <a:rPr lang="en-IN" smtClean="0"/>
-              <a:t>07-01-2026</a:t>
+              <a:t>08-01-2026</a:t>
             </a:fld>
             <a:endParaRPr lang="en-IN"/>
           </a:p>
@@ -2544,7 +2551,7 @@
           <a:p>
             <a:fld id="{86822B0A-2DE6-43ED-9578-1137B94F3B65}" type="datetime1">
               <a:rPr lang="en-IN" smtClean="0"/>
-              <a:t>07-01-2026</a:t>
+              <a:t>08-01-2026</a:t>
             </a:fld>
             <a:endParaRPr lang="en-IN"/>
           </a:p>
@@ -2801,7 +2808,7 @@
           <a:p>
             <a:fld id="{0781F493-348F-40BE-912D-787DF7E33694}" type="datetime1">
               <a:rPr lang="en-IN" smtClean="0"/>
-              <a:t>07-01-2026</a:t>
+              <a:t>08-01-2026</a:t>
             </a:fld>
             <a:endParaRPr lang="en-IN"/>
           </a:p>
@@ -3019,7 +3026,7 @@
           <a:p>
             <a:fld id="{D296BE42-94BA-4EFF-BD05-5C4A4AD389AE}" type="datetime1">
               <a:rPr lang="en-IN" smtClean="0"/>
-              <a:t>07-01-2026</a:t>
+              <a:t>08-01-2026</a:t>
             </a:fld>
             <a:endParaRPr lang="en-IN"/>
           </a:p>
@@ -4874,6 +4881,203 @@
   <p:cSld>
     <p:spTree>
       <p:nvGrpSpPr>
+        <p:cNvPr id="1" name="">
+          <a:extLst>
+            <a:ext uri="{FF2B5EF4-FFF2-40B4-BE49-F238E27FC236}">
+              <a16:creationId xmlns:a16="http://schemas.microsoft.com/office/drawing/2014/main" id="{1484129C-1CC2-9713-93E4-65C6B67809D9}"/>
+            </a:ext>
+          </a:extLst>
+        </p:cNvPr>
+        <p:cNvGrpSpPr/>
+        <p:nvPr/>
+      </p:nvGrpSpPr>
+      <p:grpSpPr>
+        <a:xfrm>
+          <a:off x="0" y="0"/>
+          <a:ext cx="0" cy="0"/>
+          <a:chOff x="0" y="0"/>
+          <a:chExt cx="0" cy="0"/>
+        </a:xfrm>
+      </p:grpSpPr>
+      <p:sp>
+        <p:nvSpPr>
+          <p:cNvPr id="2" name="Title 1">
+            <a:extLst>
+              <a:ext uri="{FF2B5EF4-FFF2-40B4-BE49-F238E27FC236}">
+                <a16:creationId xmlns:a16="http://schemas.microsoft.com/office/drawing/2014/main" id="{07F43C9A-173B-7D81-194D-EEC21AFF5ADA}"/>
+              </a:ext>
+            </a:extLst>
+          </p:cNvPr>
+          <p:cNvSpPr>
+            <a:spLocks noGrp="1"/>
+          </p:cNvSpPr>
+          <p:nvPr>
+            <p:ph type="title"/>
+          </p:nvPr>
+        </p:nvSpPr>
+        <p:spPr>
+          <a:xfrm>
+            <a:off x="548834" y="411423"/>
+            <a:ext cx="10515600" cy="1325563"/>
+          </a:xfrm>
+        </p:spPr>
+        <p:txBody>
+          <a:bodyPr/>
+          <a:lstStyle/>
+          <a:p>
+            <a:pPr marL="571500" indent="-571500">
+              <a:buFont typeface="Wingdings" panose="05000000000000000000" pitchFamily="2" charset="2"/>
+              <a:buChar char="Ø"/>
+            </a:pPr>
+            <a:r>
+              <a:rPr lang="en-IN" dirty="0">
+                <a:solidFill>
+                  <a:schemeClr val="accent1">
+                    <a:lumMod val="75000"/>
+                  </a:schemeClr>
+                </a:solidFill>
+                <a:latin typeface="Times New Roman" panose="02020603050405020304" pitchFamily="18" charset="0"/>
+                <a:cs typeface="Times New Roman" panose="02020603050405020304" pitchFamily="18" charset="0"/>
+              </a:rPr>
+              <a:t>Screenshots</a:t>
+            </a:r>
+          </a:p>
+        </p:txBody>
+      </p:sp>
+      <p:sp>
+        <p:nvSpPr>
+          <p:cNvPr id="3" name="Content Placeholder 2">
+            <a:extLst>
+              <a:ext uri="{FF2B5EF4-FFF2-40B4-BE49-F238E27FC236}">
+                <a16:creationId xmlns:a16="http://schemas.microsoft.com/office/drawing/2014/main" id="{83EB32B4-D44C-2BD1-0029-5E4D3486C95B}"/>
+              </a:ext>
+            </a:extLst>
+          </p:cNvPr>
+          <p:cNvSpPr>
+            <a:spLocks noGrp="1"/>
+          </p:cNvSpPr>
+          <p:nvPr>
+            <p:ph idx="1"/>
+          </p:nvPr>
+        </p:nvSpPr>
+        <p:spPr>
+          <a:xfrm>
+            <a:off x="3173515" y="6295060"/>
+            <a:ext cx="8073390" cy="365125"/>
+          </a:xfrm>
+        </p:spPr>
+        <p:txBody>
+          <a:bodyPr>
+            <a:normAutofit/>
+          </a:bodyPr>
+          <a:lstStyle/>
+          <a:p>
+            <a:pPr marL="0" indent="0">
+              <a:buNone/>
+            </a:pPr>
+            <a:r>
+              <a:rPr lang="en-US" sz="1800" b="1" dirty="0">
+                <a:latin typeface="Times New Roman" panose="02020603050405020304" pitchFamily="18" charset="0"/>
+                <a:cs typeface="Times New Roman" panose="02020603050405020304" pitchFamily="18" charset="0"/>
+              </a:rPr>
+              <a:t>Home Page with the Instruction for timetable generation</a:t>
+            </a:r>
+            <a:endParaRPr lang="en-IN" sz="1800" dirty="0">
+              <a:latin typeface="Times New Roman" panose="02020603050405020304" pitchFamily="18" charset="0"/>
+              <a:cs typeface="Times New Roman" panose="02020603050405020304" pitchFamily="18" charset="0"/>
+            </a:endParaRPr>
+          </a:p>
+        </p:txBody>
+      </p:sp>
+      <p:sp>
+        <p:nvSpPr>
+          <p:cNvPr id="8" name="Slide Number Placeholder 7">
+            <a:extLst>
+              <a:ext uri="{FF2B5EF4-FFF2-40B4-BE49-F238E27FC236}">
+                <a16:creationId xmlns:a16="http://schemas.microsoft.com/office/drawing/2014/main" id="{3240A100-2B71-6107-6E8B-EB81C6D6C22D}"/>
+              </a:ext>
+            </a:extLst>
+          </p:cNvPr>
+          <p:cNvSpPr>
+            <a:spLocks noGrp="1"/>
+          </p:cNvSpPr>
+          <p:nvPr>
+            <p:ph type="sldNum" sz="quarter" idx="12"/>
+          </p:nvPr>
+        </p:nvSpPr>
+        <p:spPr/>
+        <p:txBody>
+          <a:bodyPr/>
+          <a:lstStyle/>
+          <a:p>
+            <a:fld id="{D19EB42E-18EF-4ADA-8D91-F15AD1AFC8DD}" type="slidenum">
+              <a:rPr lang="en-IN" smtClean="0"/>
+              <a:t>10</a:t>
+            </a:fld>
+            <a:endParaRPr lang="en-IN" dirty="0"/>
+          </a:p>
+        </p:txBody>
+      </p:sp>
+      <p:pic>
+        <p:nvPicPr>
+          <p:cNvPr id="5" name="Picture 4">
+            <a:extLst>
+              <a:ext uri="{FF2B5EF4-FFF2-40B4-BE49-F238E27FC236}">
+                <a16:creationId xmlns:a16="http://schemas.microsoft.com/office/drawing/2014/main" id="{92DB0AC7-A877-2B0A-BC7A-9529C3056627}"/>
+              </a:ext>
+            </a:extLst>
+          </p:cNvPr>
+          <p:cNvPicPr>
+            <a:picLocks noChangeAspect="1"/>
+          </p:cNvPicPr>
+          <p:nvPr/>
+        </p:nvPicPr>
+        <p:blipFill>
+          <a:blip r:embed="rId2">
+            <a:extLst>
+              <a:ext uri="{28A0092B-C50C-407E-A947-70E740481C1C}">
+                <a14:useLocalDpi xmlns:a14="http://schemas.microsoft.com/office/drawing/2010/main" val="0"/>
+              </a:ext>
+            </a:extLst>
+          </a:blip>
+          <a:srcRect t="18337" r="21013"/>
+          <a:stretch>
+            <a:fillRect/>
+          </a:stretch>
+        </p:blipFill>
+        <p:spPr>
+          <a:xfrm>
+            <a:off x="2386437" y="1457706"/>
+            <a:ext cx="8073390" cy="4434290"/>
+          </a:xfrm>
+          <a:prstGeom prst="rect">
+            <a:avLst/>
+          </a:prstGeom>
+          <a:ln>
+            <a:solidFill>
+              <a:schemeClr val="tx1"/>
+            </a:solidFill>
+          </a:ln>
+        </p:spPr>
+      </p:pic>
+    </p:spTree>
+    <p:extLst>
+      <p:ext uri="{BB962C8B-B14F-4D97-AF65-F5344CB8AC3E}">
+        <p14:creationId xmlns:p14="http://schemas.microsoft.com/office/powerpoint/2010/main" val="3263218617"/>
+      </p:ext>
+    </p:extLst>
+  </p:cSld>
+  <p:clrMapOvr>
+    <a:masterClrMapping/>
+  </p:clrMapOvr>
+</p:sld>
+</file>
+
+<file path=ppt/slides/slide11.xml><?xml version="1.0" encoding="utf-8"?>
+<p:sld xmlns:a="http://schemas.openxmlformats.org/drawingml/2006/main" xmlns:r="http://schemas.openxmlformats.org/officeDocument/2006/relationships" xmlns:p="http://schemas.openxmlformats.org/presentationml/2006/main">
+  <p:cSld>
+    <p:spTree>
+      <p:nvGrpSpPr>
         <p:cNvPr id="1" name=""/>
         <p:cNvGrpSpPr/>
         <p:nvPr/>
@@ -4888,6 +5092,1001 @@
       </p:grpSpPr>
       <p:sp>
         <p:nvSpPr>
+          <p:cNvPr id="2" name="Slide Number Placeholder 1">
+            <a:extLst>
+              <a:ext uri="{FF2B5EF4-FFF2-40B4-BE49-F238E27FC236}">
+                <a16:creationId xmlns:a16="http://schemas.microsoft.com/office/drawing/2014/main" id="{69B4B681-AE41-CD05-54A5-65A6EA4E3496}"/>
+              </a:ext>
+            </a:extLst>
+          </p:cNvPr>
+          <p:cNvSpPr>
+            <a:spLocks noGrp="1"/>
+          </p:cNvSpPr>
+          <p:nvPr>
+            <p:ph type="sldNum" sz="quarter" idx="12"/>
+          </p:nvPr>
+        </p:nvSpPr>
+        <p:spPr/>
+        <p:txBody>
+          <a:bodyPr/>
+          <a:lstStyle/>
+          <a:p>
+            <a:fld id="{D19EB42E-18EF-4ADA-8D91-F15AD1AFC8DD}" type="slidenum">
+              <a:rPr lang="en-IN" smtClean="0"/>
+              <a:t>11</a:t>
+            </a:fld>
+            <a:endParaRPr lang="en-IN"/>
+          </a:p>
+        </p:txBody>
+      </p:sp>
+      <p:pic>
+        <p:nvPicPr>
+          <p:cNvPr id="11" name="Picture 10">
+            <a:extLst>
+              <a:ext uri="{FF2B5EF4-FFF2-40B4-BE49-F238E27FC236}">
+                <a16:creationId xmlns:a16="http://schemas.microsoft.com/office/drawing/2014/main" id="{92DDAC90-D5E1-A959-8EE6-8A6C19C83C0B}"/>
+              </a:ext>
+            </a:extLst>
+          </p:cNvPr>
+          <p:cNvPicPr>
+            <a:picLocks noChangeAspect="1"/>
+          </p:cNvPicPr>
+          <p:nvPr/>
+        </p:nvPicPr>
+        <p:blipFill>
+          <a:blip r:embed="rId2">
+            <a:extLst>
+              <a:ext uri="{28A0092B-C50C-407E-A947-70E740481C1C}">
+                <a14:useLocalDpi xmlns:a14="http://schemas.microsoft.com/office/drawing/2010/main" val="0"/>
+              </a:ext>
+            </a:extLst>
+          </a:blip>
+          <a:srcRect l="35419" t="19245" r="21195"/>
+          <a:stretch>
+            <a:fillRect/>
+          </a:stretch>
+        </p:blipFill>
+        <p:spPr>
+          <a:xfrm>
+            <a:off x="6528121" y="1125836"/>
+            <a:ext cx="5289631" cy="5230514"/>
+          </a:xfrm>
+          <a:prstGeom prst="rect">
+            <a:avLst/>
+          </a:prstGeom>
+          <a:ln>
+            <a:solidFill>
+              <a:schemeClr val="tx1"/>
+            </a:solidFill>
+          </a:ln>
+        </p:spPr>
+      </p:pic>
+      <p:pic>
+        <p:nvPicPr>
+          <p:cNvPr id="9" name="Picture 8">
+            <a:extLst>
+              <a:ext uri="{FF2B5EF4-FFF2-40B4-BE49-F238E27FC236}">
+                <a16:creationId xmlns:a16="http://schemas.microsoft.com/office/drawing/2014/main" id="{F6A76F42-2ED0-F7FB-CF2B-29150004DC1A}"/>
+              </a:ext>
+            </a:extLst>
+          </p:cNvPr>
+          <p:cNvPicPr>
+            <a:picLocks noChangeAspect="1"/>
+          </p:cNvPicPr>
+          <p:nvPr/>
+        </p:nvPicPr>
+        <p:blipFill>
+          <a:blip r:embed="rId3">
+            <a:extLst>
+              <a:ext uri="{28A0092B-C50C-407E-A947-70E740481C1C}">
+                <a14:useLocalDpi xmlns:a14="http://schemas.microsoft.com/office/drawing/2010/main" val="0"/>
+              </a:ext>
+            </a:extLst>
+          </a:blip>
+          <a:srcRect l="34656" t="19940" r="21278"/>
+          <a:stretch>
+            <a:fillRect/>
+          </a:stretch>
+        </p:blipFill>
+        <p:spPr>
+          <a:xfrm>
+            <a:off x="810227" y="1125836"/>
+            <a:ext cx="5372460" cy="5185470"/>
+          </a:xfrm>
+          <a:prstGeom prst="rect">
+            <a:avLst/>
+          </a:prstGeom>
+          <a:ln>
+            <a:solidFill>
+              <a:schemeClr val="tx1"/>
+            </a:solidFill>
+          </a:ln>
+        </p:spPr>
+      </p:pic>
+      <p:sp>
+        <p:nvSpPr>
+          <p:cNvPr id="3" name="TextBox 2">
+            <a:extLst>
+              <a:ext uri="{FF2B5EF4-FFF2-40B4-BE49-F238E27FC236}">
+                <a16:creationId xmlns:a16="http://schemas.microsoft.com/office/drawing/2014/main" id="{7AE7C364-0330-9F58-3693-6F734519D009}"/>
+              </a:ext>
+            </a:extLst>
+          </p:cNvPr>
+          <p:cNvSpPr txBox="1"/>
+          <p:nvPr/>
+        </p:nvSpPr>
+        <p:spPr>
+          <a:xfrm>
+            <a:off x="2226288" y="392764"/>
+            <a:ext cx="8300606" cy="523220"/>
+          </a:xfrm>
+          <a:prstGeom prst="rect">
+            <a:avLst/>
+          </a:prstGeom>
+          <a:noFill/>
+        </p:spPr>
+        <p:txBody>
+          <a:bodyPr wrap="none" rtlCol="0">
+            <a:spAutoFit/>
+          </a:bodyPr>
+          <a:lstStyle/>
+          <a:p>
+            <a:r>
+              <a:rPr lang="en-US" sz="2800" b="1" dirty="0">
+                <a:latin typeface="Times New Roman" panose="02020603050405020304" pitchFamily="18" charset="0"/>
+                <a:cs typeface="Times New Roman" panose="02020603050405020304" pitchFamily="18" charset="0"/>
+              </a:rPr>
+              <a:t>Department, Semester and faculty management page</a:t>
+            </a:r>
+            <a:endParaRPr lang="en-IN" sz="2800" b="1" dirty="0">
+              <a:latin typeface="Times New Roman" panose="02020603050405020304" pitchFamily="18" charset="0"/>
+              <a:cs typeface="Times New Roman" panose="02020603050405020304" pitchFamily="18" charset="0"/>
+            </a:endParaRPr>
+          </a:p>
+        </p:txBody>
+      </p:sp>
+    </p:spTree>
+    <p:extLst>
+      <p:ext uri="{BB962C8B-B14F-4D97-AF65-F5344CB8AC3E}">
+        <p14:creationId xmlns:p14="http://schemas.microsoft.com/office/powerpoint/2010/main" val="4014705697"/>
+      </p:ext>
+    </p:extLst>
+  </p:cSld>
+  <p:clrMapOvr>
+    <a:masterClrMapping/>
+  </p:clrMapOvr>
+</p:sld>
+</file>
+
+<file path=ppt/slides/slide12.xml><?xml version="1.0" encoding="utf-8"?>
+<p:sld xmlns:a="http://schemas.openxmlformats.org/drawingml/2006/main" xmlns:r="http://schemas.openxmlformats.org/officeDocument/2006/relationships" xmlns:p="http://schemas.openxmlformats.org/presentationml/2006/main">
+  <p:cSld>
+    <p:spTree>
+      <p:nvGrpSpPr>
+        <p:cNvPr id="1" name=""/>
+        <p:cNvGrpSpPr/>
+        <p:nvPr/>
+      </p:nvGrpSpPr>
+      <p:grpSpPr>
+        <a:xfrm>
+          <a:off x="0" y="0"/>
+          <a:ext cx="0" cy="0"/>
+          <a:chOff x="0" y="0"/>
+          <a:chExt cx="0" cy="0"/>
+        </a:xfrm>
+      </p:grpSpPr>
+      <p:sp>
+        <p:nvSpPr>
+          <p:cNvPr id="2" name="Slide Number Placeholder 1">
+            <a:extLst>
+              <a:ext uri="{FF2B5EF4-FFF2-40B4-BE49-F238E27FC236}">
+                <a16:creationId xmlns:a16="http://schemas.microsoft.com/office/drawing/2014/main" id="{2134EC4F-A7F0-1EC3-179C-75D0CC93D52C}"/>
+              </a:ext>
+            </a:extLst>
+          </p:cNvPr>
+          <p:cNvSpPr>
+            <a:spLocks noGrp="1"/>
+          </p:cNvSpPr>
+          <p:nvPr>
+            <p:ph type="sldNum" sz="quarter" idx="12"/>
+          </p:nvPr>
+        </p:nvSpPr>
+        <p:spPr/>
+        <p:txBody>
+          <a:bodyPr/>
+          <a:lstStyle/>
+          <a:p>
+            <a:fld id="{D19EB42E-18EF-4ADA-8D91-F15AD1AFC8DD}" type="slidenum">
+              <a:rPr lang="en-IN" smtClean="0"/>
+              <a:t>12</a:t>
+            </a:fld>
+            <a:endParaRPr lang="en-IN"/>
+          </a:p>
+        </p:txBody>
+      </p:sp>
+      <p:pic>
+        <p:nvPicPr>
+          <p:cNvPr id="15" name="Picture 14">
+            <a:extLst>
+              <a:ext uri="{FF2B5EF4-FFF2-40B4-BE49-F238E27FC236}">
+                <a16:creationId xmlns:a16="http://schemas.microsoft.com/office/drawing/2014/main" id="{859DCA19-3A50-6AE5-9D5E-83FFB551F328}"/>
+              </a:ext>
+            </a:extLst>
+          </p:cNvPr>
+          <p:cNvPicPr>
+            <a:picLocks noChangeAspect="1"/>
+          </p:cNvPicPr>
+          <p:nvPr/>
+        </p:nvPicPr>
+        <p:blipFill>
+          <a:blip r:embed="rId2">
+            <a:extLst>
+              <a:ext uri="{28A0092B-C50C-407E-A947-70E740481C1C}">
+                <a14:useLocalDpi xmlns:a14="http://schemas.microsoft.com/office/drawing/2010/main" val="0"/>
+              </a:ext>
+            </a:extLst>
+          </a:blip>
+          <a:srcRect l="36946" t="18354" r="23845"/>
+          <a:stretch>
+            <a:fillRect/>
+          </a:stretch>
+        </p:blipFill>
+        <p:spPr>
+          <a:xfrm>
+            <a:off x="6536801" y="1068121"/>
+            <a:ext cx="4780346" cy="5288229"/>
+          </a:xfrm>
+          <a:prstGeom prst="rect">
+            <a:avLst/>
+          </a:prstGeom>
+          <a:ln>
+            <a:solidFill>
+              <a:schemeClr val="tx1"/>
+            </a:solidFill>
+          </a:ln>
+        </p:spPr>
+      </p:pic>
+      <p:pic>
+        <p:nvPicPr>
+          <p:cNvPr id="13" name="Picture 12">
+            <a:extLst>
+              <a:ext uri="{FF2B5EF4-FFF2-40B4-BE49-F238E27FC236}">
+                <a16:creationId xmlns:a16="http://schemas.microsoft.com/office/drawing/2014/main" id="{CD2FB09D-71B3-CA1F-4B0B-69C0B7ED1C6A}"/>
+              </a:ext>
+            </a:extLst>
+          </p:cNvPr>
+          <p:cNvPicPr>
+            <a:picLocks noChangeAspect="1"/>
+          </p:cNvPicPr>
+          <p:nvPr/>
+        </p:nvPicPr>
+        <p:blipFill>
+          <a:blip r:embed="rId3">
+            <a:extLst>
+              <a:ext uri="{28A0092B-C50C-407E-A947-70E740481C1C}">
+                <a14:useLocalDpi xmlns:a14="http://schemas.microsoft.com/office/drawing/2010/main" val="0"/>
+              </a:ext>
+            </a:extLst>
+          </a:blip>
+          <a:srcRect l="37607" t="18354" r="24419"/>
+          <a:stretch>
+            <a:fillRect/>
+          </a:stretch>
+        </p:blipFill>
+        <p:spPr>
+          <a:xfrm>
+            <a:off x="874853" y="1068121"/>
+            <a:ext cx="4629873" cy="5288230"/>
+          </a:xfrm>
+          <a:prstGeom prst="rect">
+            <a:avLst/>
+          </a:prstGeom>
+          <a:ln>
+            <a:solidFill>
+              <a:schemeClr val="tx1"/>
+            </a:solidFill>
+          </a:ln>
+        </p:spPr>
+      </p:pic>
+      <p:sp>
+        <p:nvSpPr>
+          <p:cNvPr id="3" name="TextBox 2">
+            <a:extLst>
+              <a:ext uri="{FF2B5EF4-FFF2-40B4-BE49-F238E27FC236}">
+                <a16:creationId xmlns:a16="http://schemas.microsoft.com/office/drawing/2014/main" id="{14DDDD43-BD3D-30C9-6B65-6EE28A48CE3C}"/>
+              </a:ext>
+            </a:extLst>
+          </p:cNvPr>
+          <p:cNvSpPr txBox="1"/>
+          <p:nvPr/>
+        </p:nvSpPr>
+        <p:spPr>
+          <a:xfrm>
+            <a:off x="1462359" y="334891"/>
+            <a:ext cx="9267281" cy="523220"/>
+          </a:xfrm>
+          <a:prstGeom prst="rect">
+            <a:avLst/>
+          </a:prstGeom>
+          <a:noFill/>
+        </p:spPr>
+        <p:txBody>
+          <a:bodyPr wrap="none" rtlCol="0">
+            <a:spAutoFit/>
+          </a:bodyPr>
+          <a:lstStyle/>
+          <a:p>
+            <a:r>
+              <a:rPr lang="en-US" sz="2800" b="1" dirty="0">
+                <a:latin typeface="Times New Roman" panose="02020603050405020304" pitchFamily="18" charset="0"/>
+                <a:cs typeface="Times New Roman" panose="02020603050405020304" pitchFamily="18" charset="0"/>
+              </a:rPr>
+              <a:t>Course management and Course faculty Sem mapping page</a:t>
+            </a:r>
+            <a:endParaRPr lang="en-IN" sz="2800" b="1" dirty="0">
+              <a:latin typeface="Times New Roman" panose="02020603050405020304" pitchFamily="18" charset="0"/>
+              <a:cs typeface="Times New Roman" panose="02020603050405020304" pitchFamily="18" charset="0"/>
+            </a:endParaRPr>
+          </a:p>
+        </p:txBody>
+      </p:sp>
+    </p:spTree>
+    <p:extLst>
+      <p:ext uri="{BB962C8B-B14F-4D97-AF65-F5344CB8AC3E}">
+        <p14:creationId xmlns:p14="http://schemas.microsoft.com/office/powerpoint/2010/main" val="776262929"/>
+      </p:ext>
+    </p:extLst>
+  </p:cSld>
+  <p:clrMapOvr>
+    <a:masterClrMapping/>
+  </p:clrMapOvr>
+</p:sld>
+</file>
+
+<file path=ppt/slides/slide13.xml><?xml version="1.0" encoding="utf-8"?>
+<p:sld xmlns:a="http://schemas.openxmlformats.org/drawingml/2006/main" xmlns:r="http://schemas.openxmlformats.org/officeDocument/2006/relationships" xmlns:p="http://schemas.openxmlformats.org/presentationml/2006/main">
+  <p:cSld>
+    <p:spTree>
+      <p:nvGrpSpPr>
+        <p:cNvPr id="1" name=""/>
+        <p:cNvGrpSpPr/>
+        <p:nvPr/>
+      </p:nvGrpSpPr>
+      <p:grpSpPr>
+        <a:xfrm>
+          <a:off x="0" y="0"/>
+          <a:ext cx="0" cy="0"/>
+          <a:chOff x="0" y="0"/>
+          <a:chExt cx="0" cy="0"/>
+        </a:xfrm>
+      </p:grpSpPr>
+      <p:sp>
+        <p:nvSpPr>
+          <p:cNvPr id="2" name="Slide Number Placeholder 1">
+            <a:extLst>
+              <a:ext uri="{FF2B5EF4-FFF2-40B4-BE49-F238E27FC236}">
+                <a16:creationId xmlns:a16="http://schemas.microsoft.com/office/drawing/2014/main" id="{E694DA22-1C59-2279-D236-E6D421A9BE73}"/>
+              </a:ext>
+            </a:extLst>
+          </p:cNvPr>
+          <p:cNvSpPr>
+            <a:spLocks noGrp="1"/>
+          </p:cNvSpPr>
+          <p:nvPr>
+            <p:ph type="sldNum" sz="quarter" idx="12"/>
+          </p:nvPr>
+        </p:nvSpPr>
+        <p:spPr/>
+        <p:txBody>
+          <a:bodyPr/>
+          <a:lstStyle/>
+          <a:p>
+            <a:fld id="{D19EB42E-18EF-4ADA-8D91-F15AD1AFC8DD}" type="slidenum">
+              <a:rPr lang="en-IN" smtClean="0"/>
+              <a:t>13</a:t>
+            </a:fld>
+            <a:endParaRPr lang="en-IN"/>
+          </a:p>
+        </p:txBody>
+      </p:sp>
+      <p:pic>
+        <p:nvPicPr>
+          <p:cNvPr id="29" name="Picture 28">
+            <a:extLst>
+              <a:ext uri="{FF2B5EF4-FFF2-40B4-BE49-F238E27FC236}">
+                <a16:creationId xmlns:a16="http://schemas.microsoft.com/office/drawing/2014/main" id="{F3396EE4-A2BE-ACF9-1D0A-CFAFED7C7941}"/>
+              </a:ext>
+            </a:extLst>
+          </p:cNvPr>
+          <p:cNvPicPr>
+            <a:picLocks noChangeAspect="1"/>
+          </p:cNvPicPr>
+          <p:nvPr/>
+        </p:nvPicPr>
+        <p:blipFill>
+          <a:blip r:embed="rId2">
+            <a:extLst>
+              <a:ext uri="{28A0092B-C50C-407E-A947-70E740481C1C}">
+                <a14:useLocalDpi xmlns:a14="http://schemas.microsoft.com/office/drawing/2010/main" val="0"/>
+              </a:ext>
+            </a:extLst>
+          </a:blip>
+          <a:srcRect l="5359" t="34309" r="28112" b="14403"/>
+          <a:stretch>
+            <a:fillRect/>
+          </a:stretch>
+        </p:blipFill>
+        <p:spPr>
+          <a:xfrm>
+            <a:off x="5512140" y="939427"/>
+            <a:ext cx="6405812" cy="2623474"/>
+          </a:xfrm>
+          <a:prstGeom prst="rect">
+            <a:avLst/>
+          </a:prstGeom>
+          <a:ln>
+            <a:solidFill>
+              <a:schemeClr val="tx1"/>
+            </a:solidFill>
+          </a:ln>
+        </p:spPr>
+      </p:pic>
+      <p:pic>
+        <p:nvPicPr>
+          <p:cNvPr id="27" name="Picture 26">
+            <a:extLst>
+              <a:ext uri="{FF2B5EF4-FFF2-40B4-BE49-F238E27FC236}">
+                <a16:creationId xmlns:a16="http://schemas.microsoft.com/office/drawing/2014/main" id="{323ADD82-643F-798B-52C3-2F796A01F04E}"/>
+              </a:ext>
+            </a:extLst>
+          </p:cNvPr>
+          <p:cNvPicPr>
+            <a:picLocks noChangeAspect="1"/>
+          </p:cNvPicPr>
+          <p:nvPr/>
+        </p:nvPicPr>
+        <p:blipFill>
+          <a:blip r:embed="rId3">
+            <a:extLst>
+              <a:ext uri="{28A0092B-C50C-407E-A947-70E740481C1C}">
+                <a14:useLocalDpi xmlns:a14="http://schemas.microsoft.com/office/drawing/2010/main" val="0"/>
+              </a:ext>
+            </a:extLst>
+          </a:blip>
+          <a:srcRect l="5580" t="28749" r="29958" b="15138"/>
+          <a:stretch>
+            <a:fillRect/>
+          </a:stretch>
+        </p:blipFill>
+        <p:spPr>
+          <a:xfrm>
+            <a:off x="5512140" y="3644217"/>
+            <a:ext cx="6405812" cy="2962335"/>
+          </a:xfrm>
+          <a:prstGeom prst="rect">
+            <a:avLst/>
+          </a:prstGeom>
+          <a:ln>
+            <a:solidFill>
+              <a:schemeClr val="tx1"/>
+            </a:solidFill>
+          </a:ln>
+        </p:spPr>
+      </p:pic>
+      <p:pic>
+        <p:nvPicPr>
+          <p:cNvPr id="21" name="Picture 20">
+            <a:extLst>
+              <a:ext uri="{FF2B5EF4-FFF2-40B4-BE49-F238E27FC236}">
+                <a16:creationId xmlns:a16="http://schemas.microsoft.com/office/drawing/2014/main" id="{7FDFAAD9-2518-16A3-388B-3D7664F7EBC0}"/>
+              </a:ext>
+            </a:extLst>
+          </p:cNvPr>
+          <p:cNvPicPr>
+            <a:picLocks noChangeAspect="1"/>
+          </p:cNvPicPr>
+          <p:nvPr/>
+        </p:nvPicPr>
+        <p:blipFill>
+          <a:blip r:embed="rId4">
+            <a:extLst>
+              <a:ext uri="{28A0092B-C50C-407E-A947-70E740481C1C}">
+                <a14:useLocalDpi xmlns:a14="http://schemas.microsoft.com/office/drawing/2010/main" val="0"/>
+              </a:ext>
+            </a:extLst>
+          </a:blip>
+          <a:srcRect l="34787" t="21792" r="25150"/>
+          <a:stretch>
+            <a:fillRect/>
+          </a:stretch>
+        </p:blipFill>
+        <p:spPr>
+          <a:xfrm>
+            <a:off x="474561" y="1030146"/>
+            <a:ext cx="4884517" cy="5065511"/>
+          </a:xfrm>
+          <a:prstGeom prst="rect">
+            <a:avLst/>
+          </a:prstGeom>
+          <a:ln>
+            <a:solidFill>
+              <a:schemeClr val="tx1"/>
+            </a:solidFill>
+          </a:ln>
+        </p:spPr>
+      </p:pic>
+      <p:sp>
+        <p:nvSpPr>
+          <p:cNvPr id="3" name="TextBox 2">
+            <a:extLst>
+              <a:ext uri="{FF2B5EF4-FFF2-40B4-BE49-F238E27FC236}">
+                <a16:creationId xmlns:a16="http://schemas.microsoft.com/office/drawing/2014/main" id="{10E37F7D-EB5F-EDEE-B5B4-640E46DA025A}"/>
+              </a:ext>
+            </a:extLst>
+          </p:cNvPr>
+          <p:cNvSpPr txBox="1"/>
+          <p:nvPr/>
+        </p:nvSpPr>
+        <p:spPr>
+          <a:xfrm>
+            <a:off x="2215899" y="334891"/>
+            <a:ext cx="7760201" cy="523220"/>
+          </a:xfrm>
+          <a:prstGeom prst="rect">
+            <a:avLst/>
+          </a:prstGeom>
+          <a:noFill/>
+        </p:spPr>
+        <p:txBody>
+          <a:bodyPr wrap="none" rtlCol="0">
+            <a:spAutoFit/>
+          </a:bodyPr>
+          <a:lstStyle/>
+          <a:p>
+            <a:r>
+              <a:rPr lang="en-US" sz="2800" b="1" dirty="0">
+                <a:latin typeface="Times New Roman" panose="02020603050405020304" pitchFamily="18" charset="0"/>
+                <a:cs typeface="Times New Roman" panose="02020603050405020304" pitchFamily="18" charset="0"/>
+              </a:rPr>
+              <a:t>Generated Timetable and Downloaded Timetable</a:t>
+            </a:r>
+            <a:endParaRPr lang="en-IN" sz="2800" b="1" dirty="0">
+              <a:latin typeface="Times New Roman" panose="02020603050405020304" pitchFamily="18" charset="0"/>
+              <a:cs typeface="Times New Roman" panose="02020603050405020304" pitchFamily="18" charset="0"/>
+            </a:endParaRPr>
+          </a:p>
+        </p:txBody>
+      </p:sp>
+    </p:spTree>
+    <p:extLst>
+      <p:ext uri="{BB962C8B-B14F-4D97-AF65-F5344CB8AC3E}">
+        <p14:creationId xmlns:p14="http://schemas.microsoft.com/office/powerpoint/2010/main" val="2331541959"/>
+      </p:ext>
+    </p:extLst>
+  </p:cSld>
+  <p:clrMapOvr>
+    <a:masterClrMapping/>
+  </p:clrMapOvr>
+</p:sld>
+</file>
+
+<file path=ppt/slides/slide14.xml><?xml version="1.0" encoding="utf-8"?>
+<p:sld xmlns:a="http://schemas.openxmlformats.org/drawingml/2006/main" xmlns:r="http://schemas.openxmlformats.org/officeDocument/2006/relationships" xmlns:p="http://schemas.openxmlformats.org/presentationml/2006/main">
+  <p:cSld>
+    <p:spTree>
+      <p:nvGrpSpPr>
+        <p:cNvPr id="1" name=""/>
+        <p:cNvGrpSpPr/>
+        <p:nvPr/>
+      </p:nvGrpSpPr>
+      <p:grpSpPr>
+        <a:xfrm>
+          <a:off x="0" y="0"/>
+          <a:ext cx="0" cy="0"/>
+          <a:chOff x="0" y="0"/>
+          <a:chExt cx="0" cy="0"/>
+        </a:xfrm>
+      </p:grpSpPr>
+      <p:sp>
+        <p:nvSpPr>
+          <p:cNvPr id="2" name="Slide Number Placeholder 1">
+            <a:extLst>
+              <a:ext uri="{FF2B5EF4-FFF2-40B4-BE49-F238E27FC236}">
+                <a16:creationId xmlns:a16="http://schemas.microsoft.com/office/drawing/2014/main" id="{41039D40-F0BA-4BD8-FF0C-58EDD9C69537}"/>
+              </a:ext>
+            </a:extLst>
+          </p:cNvPr>
+          <p:cNvSpPr>
+            <a:spLocks noGrp="1"/>
+          </p:cNvSpPr>
+          <p:nvPr>
+            <p:ph type="sldNum" sz="quarter" idx="12"/>
+          </p:nvPr>
+        </p:nvSpPr>
+        <p:spPr/>
+        <p:txBody>
+          <a:bodyPr/>
+          <a:lstStyle/>
+          <a:p>
+            <a:fld id="{D19EB42E-18EF-4ADA-8D91-F15AD1AFC8DD}" type="slidenum">
+              <a:rPr lang="en-IN" smtClean="0"/>
+              <a:t>14</a:t>
+            </a:fld>
+            <a:endParaRPr lang="en-IN"/>
+          </a:p>
+        </p:txBody>
+      </p:sp>
+      <p:pic>
+        <p:nvPicPr>
+          <p:cNvPr id="33" name="Picture 32">
+            <a:extLst>
+              <a:ext uri="{FF2B5EF4-FFF2-40B4-BE49-F238E27FC236}">
+                <a16:creationId xmlns:a16="http://schemas.microsoft.com/office/drawing/2014/main" id="{8B20CF94-2C7B-383D-04BE-7A8EAE064AF3}"/>
+              </a:ext>
+            </a:extLst>
+          </p:cNvPr>
+          <p:cNvPicPr>
+            <a:picLocks noChangeAspect="1"/>
+          </p:cNvPicPr>
+          <p:nvPr/>
+        </p:nvPicPr>
+        <p:blipFill>
+          <a:blip r:embed="rId2">
+            <a:extLst>
+              <a:ext uri="{28A0092B-C50C-407E-A947-70E740481C1C}">
+                <a14:useLocalDpi xmlns:a14="http://schemas.microsoft.com/office/drawing/2010/main" val="0"/>
+              </a:ext>
+            </a:extLst>
+          </a:blip>
+          <a:srcRect l="999" t="16438" r="22102" b="358"/>
+          <a:stretch>
+            <a:fillRect/>
+          </a:stretch>
+        </p:blipFill>
+        <p:spPr>
+          <a:xfrm>
+            <a:off x="6219931" y="1317211"/>
+            <a:ext cx="5888650" cy="3384847"/>
+          </a:xfrm>
+          <a:prstGeom prst="rect">
+            <a:avLst/>
+          </a:prstGeom>
+          <a:ln>
+            <a:solidFill>
+              <a:schemeClr val="tx1"/>
+            </a:solidFill>
+          </a:ln>
+        </p:spPr>
+      </p:pic>
+      <p:pic>
+        <p:nvPicPr>
+          <p:cNvPr id="31" name="Picture 30">
+            <a:extLst>
+              <a:ext uri="{FF2B5EF4-FFF2-40B4-BE49-F238E27FC236}">
+                <a16:creationId xmlns:a16="http://schemas.microsoft.com/office/drawing/2014/main" id="{4FBA5517-FC00-FA78-6E62-C9D257C2C1E3}"/>
+              </a:ext>
+            </a:extLst>
+          </p:cNvPr>
+          <p:cNvPicPr>
+            <a:picLocks noChangeAspect="1"/>
+          </p:cNvPicPr>
+          <p:nvPr/>
+        </p:nvPicPr>
+        <p:blipFill>
+          <a:blip r:embed="rId3">
+            <a:extLst>
+              <a:ext uri="{28A0092B-C50C-407E-A947-70E740481C1C}">
+                <a14:useLocalDpi xmlns:a14="http://schemas.microsoft.com/office/drawing/2010/main" val="0"/>
+              </a:ext>
+            </a:extLst>
+          </a:blip>
+          <a:srcRect l="1481" t="16268" r="21194"/>
+          <a:stretch>
+            <a:fillRect/>
+          </a:stretch>
+        </p:blipFill>
+        <p:spPr>
+          <a:xfrm>
+            <a:off x="207350" y="1314474"/>
+            <a:ext cx="5888650" cy="3387584"/>
+          </a:xfrm>
+          <a:prstGeom prst="rect">
+            <a:avLst/>
+          </a:prstGeom>
+          <a:ln>
+            <a:solidFill>
+              <a:schemeClr val="tx1"/>
+            </a:solidFill>
+          </a:ln>
+        </p:spPr>
+      </p:pic>
+      <p:sp>
+        <p:nvSpPr>
+          <p:cNvPr id="3" name="TextBox 2">
+            <a:extLst>
+              <a:ext uri="{FF2B5EF4-FFF2-40B4-BE49-F238E27FC236}">
+                <a16:creationId xmlns:a16="http://schemas.microsoft.com/office/drawing/2014/main" id="{028D97AC-2345-D7D9-9F7D-BEFA55752D0D}"/>
+              </a:ext>
+            </a:extLst>
+          </p:cNvPr>
+          <p:cNvSpPr txBox="1"/>
+          <p:nvPr/>
+        </p:nvSpPr>
+        <p:spPr>
+          <a:xfrm>
+            <a:off x="4320532" y="590309"/>
+            <a:ext cx="3798797" cy="523220"/>
+          </a:xfrm>
+          <a:prstGeom prst="rect">
+            <a:avLst/>
+          </a:prstGeom>
+          <a:noFill/>
+        </p:spPr>
+        <p:txBody>
+          <a:bodyPr wrap="none" rtlCol="0">
+            <a:spAutoFit/>
+          </a:bodyPr>
+          <a:lstStyle/>
+          <a:p>
+            <a:r>
+              <a:rPr lang="en-US" sz="2800" b="1" dirty="0">
+                <a:latin typeface="Times New Roman" panose="02020603050405020304" pitchFamily="18" charset="0"/>
+                <a:cs typeface="Times New Roman" panose="02020603050405020304" pitchFamily="18" charset="0"/>
+              </a:rPr>
+              <a:t>Timetable </a:t>
+            </a:r>
+            <a:r>
+              <a:rPr lang="en-US" sz="2800" b="1" dirty="0" err="1">
+                <a:latin typeface="Times New Roman" panose="02020603050405020304" pitchFamily="18" charset="0"/>
+                <a:cs typeface="Times New Roman" panose="02020603050405020304" pitchFamily="18" charset="0"/>
+              </a:rPr>
+              <a:t>Visualisation</a:t>
+            </a:r>
+            <a:endParaRPr lang="en-IN" sz="2800" b="1" dirty="0">
+              <a:latin typeface="Times New Roman" panose="02020603050405020304" pitchFamily="18" charset="0"/>
+              <a:cs typeface="Times New Roman" panose="02020603050405020304" pitchFamily="18" charset="0"/>
+            </a:endParaRPr>
+          </a:p>
+        </p:txBody>
+      </p:sp>
+    </p:spTree>
+    <p:extLst>
+      <p:ext uri="{BB962C8B-B14F-4D97-AF65-F5344CB8AC3E}">
+        <p14:creationId xmlns:p14="http://schemas.microsoft.com/office/powerpoint/2010/main" val="2426814197"/>
+      </p:ext>
+    </p:extLst>
+  </p:cSld>
+  <p:clrMapOvr>
+    <a:masterClrMapping/>
+  </p:clrMapOvr>
+</p:sld>
+</file>
+
+<file path=ppt/slides/slide15.xml><?xml version="1.0" encoding="utf-8"?>
+<p:sld xmlns:a="http://schemas.openxmlformats.org/drawingml/2006/main" xmlns:r="http://schemas.openxmlformats.org/officeDocument/2006/relationships" xmlns:p="http://schemas.openxmlformats.org/presentationml/2006/main">
+  <p:cSld>
+    <p:spTree>
+      <p:nvGrpSpPr>
+        <p:cNvPr id="1" name=""/>
+        <p:cNvGrpSpPr/>
+        <p:nvPr/>
+      </p:nvGrpSpPr>
+      <p:grpSpPr>
+        <a:xfrm>
+          <a:off x="0" y="0"/>
+          <a:ext cx="0" cy="0"/>
+          <a:chOff x="0" y="0"/>
+          <a:chExt cx="0" cy="0"/>
+        </a:xfrm>
+      </p:grpSpPr>
+      <p:sp>
+        <p:nvSpPr>
+          <p:cNvPr id="2" name="Title 1">
+            <a:extLst>
+              <a:ext uri="{FF2B5EF4-FFF2-40B4-BE49-F238E27FC236}">
+                <a16:creationId xmlns:a16="http://schemas.microsoft.com/office/drawing/2014/main" id="{E2C68626-3BE7-4580-F05D-866CB54DE4AC}"/>
+              </a:ext>
+            </a:extLst>
+          </p:cNvPr>
+          <p:cNvSpPr>
+            <a:spLocks noGrp="1"/>
+          </p:cNvSpPr>
+          <p:nvPr>
+            <p:ph type="title"/>
+          </p:nvPr>
+        </p:nvSpPr>
+        <p:spPr>
+          <a:xfrm>
+            <a:off x="548833" y="399849"/>
+            <a:ext cx="10515600" cy="1325563"/>
+          </a:xfrm>
+        </p:spPr>
+        <p:txBody>
+          <a:bodyPr/>
+          <a:lstStyle/>
+          <a:p>
+            <a:pPr marL="571500" indent="-571500">
+              <a:buFont typeface="Wingdings" panose="05000000000000000000" pitchFamily="2" charset="2"/>
+              <a:buChar char="Ø"/>
+            </a:pPr>
+            <a:r>
+              <a:rPr lang="en-IN" dirty="0">
+                <a:solidFill>
+                  <a:schemeClr val="accent1">
+                    <a:lumMod val="75000"/>
+                  </a:schemeClr>
+                </a:solidFill>
+                <a:latin typeface="Times New Roman" panose="02020603050405020304" pitchFamily="18" charset="0"/>
+                <a:cs typeface="Times New Roman" panose="02020603050405020304" pitchFamily="18" charset="0"/>
+              </a:rPr>
+              <a:t>Conclusion</a:t>
+            </a:r>
+          </a:p>
+        </p:txBody>
+      </p:sp>
+      <p:sp>
+        <p:nvSpPr>
+          <p:cNvPr id="3" name="Content Placeholder 2">
+            <a:extLst>
+              <a:ext uri="{FF2B5EF4-FFF2-40B4-BE49-F238E27FC236}">
+                <a16:creationId xmlns:a16="http://schemas.microsoft.com/office/drawing/2014/main" id="{D8046ABC-16CE-210D-17D4-7F4327520C78}"/>
+              </a:ext>
+            </a:extLst>
+          </p:cNvPr>
+          <p:cNvSpPr>
+            <a:spLocks noGrp="1"/>
+          </p:cNvSpPr>
+          <p:nvPr>
+            <p:ph idx="1"/>
+          </p:nvPr>
+        </p:nvSpPr>
+        <p:spPr>
+          <a:xfrm>
+            <a:off x="329381" y="1725412"/>
+            <a:ext cx="11533238" cy="3759098"/>
+          </a:xfrm>
+        </p:spPr>
+        <p:txBody>
+          <a:bodyPr>
+            <a:normAutofit/>
+          </a:bodyPr>
+          <a:lstStyle/>
+          <a:p>
+            <a:pPr algn="just">
+              <a:lnSpc>
+                <a:spcPct val="150000"/>
+              </a:lnSpc>
+            </a:pPr>
+            <a:r>
+              <a:rPr lang="en-US" sz="2400" dirty="0">
+                <a:latin typeface="Times New Roman" panose="02020603050405020304" pitchFamily="18" charset="0"/>
+                <a:cs typeface="Times New Roman" panose="02020603050405020304" pitchFamily="18" charset="0"/>
+              </a:rPr>
+              <a:t>The Web-Based Automatic Timetable Scheduler effectively automates the process of academic timetable generation using a Genetic Algorithm. The system produces conflict-free schedules while considering faculty availability and institutional constraints. It reduces manual effort, improves scheduling accuracy, and provides a reliable solution for real-world academic environments.</a:t>
+            </a:r>
+          </a:p>
+        </p:txBody>
+      </p:sp>
+      <p:sp>
+        <p:nvSpPr>
+          <p:cNvPr id="8" name="Slide Number Placeholder 7">
+            <a:extLst>
+              <a:ext uri="{FF2B5EF4-FFF2-40B4-BE49-F238E27FC236}">
+                <a16:creationId xmlns:a16="http://schemas.microsoft.com/office/drawing/2014/main" id="{BB230758-FB0A-8344-3307-F9D313073EE3}"/>
+              </a:ext>
+            </a:extLst>
+          </p:cNvPr>
+          <p:cNvSpPr>
+            <a:spLocks noGrp="1"/>
+          </p:cNvSpPr>
+          <p:nvPr>
+            <p:ph type="sldNum" sz="quarter" idx="12"/>
+          </p:nvPr>
+        </p:nvSpPr>
+        <p:spPr/>
+        <p:txBody>
+          <a:bodyPr/>
+          <a:lstStyle/>
+          <a:p>
+            <a:fld id="{D19EB42E-18EF-4ADA-8D91-F15AD1AFC8DD}" type="slidenum">
+              <a:rPr lang="en-IN" smtClean="0"/>
+              <a:t>15</a:t>
+            </a:fld>
+            <a:endParaRPr lang="en-IN"/>
+          </a:p>
+        </p:txBody>
+      </p:sp>
+    </p:spTree>
+    <p:extLst>
+      <p:ext uri="{BB962C8B-B14F-4D97-AF65-F5344CB8AC3E}">
+        <p14:creationId xmlns:p14="http://schemas.microsoft.com/office/powerpoint/2010/main" val="1025537525"/>
+      </p:ext>
+    </p:extLst>
+  </p:cSld>
+  <p:clrMapOvr>
+    <a:masterClrMapping/>
+  </p:clrMapOvr>
+</p:sld>
+</file>
+
+<file path=ppt/slides/slide16.xml><?xml version="1.0" encoding="utf-8"?>
+<p:sld xmlns:a="http://schemas.openxmlformats.org/drawingml/2006/main" xmlns:r="http://schemas.openxmlformats.org/officeDocument/2006/relationships" xmlns:p="http://schemas.openxmlformats.org/presentationml/2006/main">
+  <p:cSld>
+    <p:spTree>
+      <p:nvGrpSpPr>
+        <p:cNvPr id="1" name=""/>
+        <p:cNvGrpSpPr/>
+        <p:nvPr/>
+      </p:nvGrpSpPr>
+      <p:grpSpPr>
+        <a:xfrm>
+          <a:off x="0" y="0"/>
+          <a:ext cx="0" cy="0"/>
+          <a:chOff x="0" y="0"/>
+          <a:chExt cx="0" cy="0"/>
+        </a:xfrm>
+      </p:grpSpPr>
+      <p:sp>
+        <p:nvSpPr>
+          <p:cNvPr id="4" name="Slide Number Placeholder 3">
+            <a:extLst>
+              <a:ext uri="{FF2B5EF4-FFF2-40B4-BE49-F238E27FC236}">
+                <a16:creationId xmlns:a16="http://schemas.microsoft.com/office/drawing/2014/main" id="{3E73AD47-FF7D-1A0B-9221-7920DDFBFB52}"/>
+              </a:ext>
+            </a:extLst>
+          </p:cNvPr>
+          <p:cNvSpPr>
+            <a:spLocks noGrp="1"/>
+          </p:cNvSpPr>
+          <p:nvPr>
+            <p:ph type="sldNum" sz="quarter" idx="12"/>
+          </p:nvPr>
+        </p:nvSpPr>
+        <p:spPr/>
+        <p:txBody>
+          <a:bodyPr/>
+          <a:lstStyle/>
+          <a:p>
+            <a:fld id="{D19EB42E-18EF-4ADA-8D91-F15AD1AFC8DD}" type="slidenum">
+              <a:rPr lang="en-IN" smtClean="0"/>
+              <a:t>16</a:t>
+            </a:fld>
+            <a:endParaRPr lang="en-IN"/>
+          </a:p>
+        </p:txBody>
+      </p:sp>
+    </p:spTree>
+    <p:extLst>
+      <p:ext uri="{BB962C8B-B14F-4D97-AF65-F5344CB8AC3E}">
+        <p14:creationId xmlns:p14="http://schemas.microsoft.com/office/powerpoint/2010/main" val="296000706"/>
+      </p:ext>
+    </p:extLst>
+  </p:cSld>
+  <p:clrMapOvr>
+    <a:masterClrMapping/>
+  </p:clrMapOvr>
+</p:sld>
+</file>
+
+<file path=ppt/slides/slide17.xml><?xml version="1.0" encoding="utf-8"?>
+<p:sld xmlns:a="http://schemas.openxmlformats.org/drawingml/2006/main" xmlns:r="http://schemas.openxmlformats.org/officeDocument/2006/relationships" xmlns:p="http://schemas.openxmlformats.org/presentationml/2006/main">
+  <p:cSld>
+    <p:spTree>
+      <p:nvGrpSpPr>
+        <p:cNvPr id="1" name=""/>
+        <p:cNvGrpSpPr/>
+        <p:nvPr/>
+      </p:nvGrpSpPr>
+      <p:grpSpPr>
+        <a:xfrm>
+          <a:off x="0" y="0"/>
+          <a:ext cx="0" cy="0"/>
+          <a:chOff x="0" y="0"/>
+          <a:chExt cx="0" cy="0"/>
+        </a:xfrm>
+      </p:grpSpPr>
+      <p:sp>
+        <p:nvSpPr>
           <p:cNvPr id="5" name="Title 1">
             <a:extLst>
               <a:ext uri="{FF2B5EF4-FFF2-40B4-BE49-F238E27FC236}">
@@ -5233,7 +6432,7 @@
           <a:p>
             <a:fld id="{D19EB42E-18EF-4ADA-8D91-F15AD1AFC8DD}" type="slidenum">
               <a:rPr lang="en-IN" smtClean="0"/>
-              <a:t>10</a:t>
+              <a:t>17</a:t>
             </a:fld>
             <a:endParaRPr lang="en-IN" dirty="0"/>
           </a:p>
@@ -5287,7 +6486,7 @@
         </p:nvSpPr>
         <p:spPr>
           <a:xfrm>
-            <a:off x="344345" y="1735232"/>
+            <a:off x="344345" y="1665539"/>
             <a:ext cx="11503309" cy="5192461"/>
           </a:xfrm>
         </p:spPr>
@@ -5297,33 +6496,20 @@
           </a:bodyPr>
           <a:lstStyle/>
           <a:p>
-            <a:pPr algn="just">
+            <a:pPr marL="0" indent="0" algn="just">
               <a:lnSpc>
                 <a:spcPct val="150000"/>
               </a:lnSpc>
+              <a:buNone/>
             </a:pPr>
             <a:r>
-              <a:rPr lang="en-US" sz="2200" dirty="0">
-                <a:latin typeface="Times New Roman" panose="02020603050405020304" pitchFamily="18" charset="0"/>
-                <a:cs typeface="Times New Roman" panose="02020603050405020304" pitchFamily="18" charset="0"/>
-              </a:rPr>
-              <a:t>Web-based Automatic timetable Scheduler for schools and colleges, eliminating the need for manual scheduling. It ensures efficient allocation of subjects, faculty, and classrooms while avoiding conflicts and reducing human effort. The system provides a user-friendly web interface where administrators can input details, and the algorithm takes care of scheduling.</a:t>
-            </a:r>
-          </a:p>
-          <a:p>
-            <a:pPr algn="just">
-              <a:lnSpc>
-                <a:spcPct val="150000"/>
-              </a:lnSpc>
-            </a:pPr>
-            <a:r>
-              <a:rPr lang="en-US" sz="2200" dirty="0">
-                <a:latin typeface="Times New Roman" panose="02020603050405020304" pitchFamily="18" charset="0"/>
-                <a:cs typeface="Times New Roman" panose="02020603050405020304" pitchFamily="18" charset="0"/>
-              </a:rPr>
-              <a:t>This is a NP-Hard Problem where the exact solution cannot be determined thus the project uses the Genetic Algorithm (GA) to optimize timetables by generating multiple scheduling options, evaluating them for conflicts, and improving them through selection, crossover, and mutation. The process continues until the best possible timetable is achieved, ensuring a balanced, conflict-free, and efficient schedule for all stakeholders.</a:t>
-            </a:r>
-            <a:endParaRPr lang="en-IN" sz="2200" dirty="0">
+              <a:rPr lang="en-US" sz="2600" dirty="0">
+                <a:latin typeface="Times New Roman" panose="02020603050405020304" pitchFamily="18" charset="0"/>
+                <a:cs typeface="Times New Roman" panose="02020603050405020304" pitchFamily="18" charset="0"/>
+              </a:rPr>
+              <a:t>Timetable scheduling is a core administrative task in educational institutions that involves managing multiple constraints such as faculty availability, course requirements, and class distribution. Traditionally, this process is carried out manually, which is time-consuming and prone to errors. With increasing academic complexity, the need for an automated system capable of efficiently generating accurate and conflict-free timetables has become evident. This requirement is addressed by the Web-Based Automatic Timetable Scheduler, which provides a comprehensive web-based solution for automated timetable generation..</a:t>
+            </a:r>
+            <a:endParaRPr lang="en-IN" sz="2600" dirty="0">
               <a:latin typeface="Times New Roman" panose="02020603050405020304" pitchFamily="18" charset="0"/>
               <a:cs typeface="Times New Roman" panose="02020603050405020304" pitchFamily="18" charset="0"/>
             </a:endParaRPr>
@@ -5495,76 +6681,8 @@
                 <a:latin typeface="Times New Roman" panose="02020603050405020304" pitchFamily="18" charset="0"/>
                 <a:cs typeface="Times New Roman" panose="02020603050405020304" pitchFamily="18" charset="0"/>
               </a:rPr>
-              <a:t>Problem Statement</a:t>
-            </a:r>
-          </a:p>
-        </p:txBody>
-      </p:sp>
-      <p:sp>
-        <p:nvSpPr>
-          <p:cNvPr id="3" name="Content Placeholder 2">
-            <a:extLst>
-              <a:ext uri="{FF2B5EF4-FFF2-40B4-BE49-F238E27FC236}">
-                <a16:creationId xmlns:a16="http://schemas.microsoft.com/office/drawing/2014/main" id="{533891F3-5C12-F109-C168-313B222F5D26}"/>
-              </a:ext>
-            </a:extLst>
-          </p:cNvPr>
-          <p:cNvSpPr>
-            <a:spLocks noGrp="1"/>
-          </p:cNvSpPr>
-          <p:nvPr>
-            <p:ph idx="1"/>
-          </p:nvPr>
-        </p:nvSpPr>
-        <p:spPr>
-          <a:xfrm>
-            <a:off x="349045" y="1737771"/>
-            <a:ext cx="11493910" cy="3483158"/>
-          </a:xfrm>
-        </p:spPr>
-        <p:txBody>
-          <a:bodyPr>
-            <a:normAutofit fontScale="85000" lnSpcReduction="10000"/>
-          </a:bodyPr>
-          <a:lstStyle/>
-          <a:p>
-            <a:pPr algn="just">
-              <a:lnSpc>
-                <a:spcPct val="160000"/>
-              </a:lnSpc>
-            </a:pPr>
-            <a:r>
-              <a:rPr lang="en-US" dirty="0">
-                <a:latin typeface="Times New Roman" panose="02020603050405020304" pitchFamily="18" charset="0"/>
-                <a:cs typeface="Times New Roman" panose="02020603050405020304" pitchFamily="18" charset="0"/>
-              </a:rPr>
-              <a:t>Timetable scheduling is an NP-Hard combinatorial optimization problem faced by educational institutions. The challenge involves allocating courses, instructors, students, and classrooms to specific time slots while adhering to multiple constraints.</a:t>
-            </a:r>
-          </a:p>
-          <a:p>
-            <a:pPr algn="just">
-              <a:lnSpc>
-                <a:spcPct val="160000"/>
-              </a:lnSpc>
-            </a:pPr>
-            <a:r>
-              <a:rPr lang="en-US" dirty="0">
-                <a:latin typeface="Times New Roman" panose="02020603050405020304" pitchFamily="18" charset="0"/>
-                <a:cs typeface="Times New Roman" panose="02020603050405020304" pitchFamily="18" charset="0"/>
-              </a:rPr>
-              <a:t> The traditional manual approach to timetable generation is time-consuming, error-prone, and often leads to scheduling conflicts.</a:t>
-            </a:r>
-          </a:p>
-          <a:p>
-            <a:pPr algn="just">
-              <a:lnSpc>
-                <a:spcPct val="160000"/>
-              </a:lnSpc>
-            </a:pPr>
-            <a:endParaRPr lang="en-IN" sz="2400" dirty="0">
-              <a:latin typeface="Times New Roman" panose="02020603050405020304" pitchFamily="18" charset="0"/>
-              <a:cs typeface="Times New Roman" panose="02020603050405020304" pitchFamily="18" charset="0"/>
-            </a:endParaRPr>
+              <a:t>Objectives</a:t>
+            </a:r>
           </a:p>
         </p:txBody>
       </p:sp>
@@ -5594,6 +6712,172 @@
               <a:t>3</a:t>
             </a:fld>
             <a:endParaRPr lang="en-IN"/>
+          </a:p>
+        </p:txBody>
+      </p:sp>
+      <p:sp>
+        <p:nvSpPr>
+          <p:cNvPr id="12" name="Content Placeholder 11">
+            <a:extLst>
+              <a:ext uri="{FF2B5EF4-FFF2-40B4-BE49-F238E27FC236}">
+                <a16:creationId xmlns:a16="http://schemas.microsoft.com/office/drawing/2014/main" id="{3C56EA43-807D-8DFD-20B6-9D2F1F4DD58F}"/>
+              </a:ext>
+            </a:extLst>
+          </p:cNvPr>
+          <p:cNvSpPr>
+            <a:spLocks noGrp="1"/>
+          </p:cNvSpPr>
+          <p:nvPr>
+            <p:ph idx="1"/>
+          </p:nvPr>
+        </p:nvSpPr>
+        <p:spPr>
+          <a:xfrm>
+            <a:off x="548832" y="1737771"/>
+            <a:ext cx="10804968" cy="4983704"/>
+          </a:xfrm>
+        </p:spPr>
+        <p:txBody>
+          <a:bodyPr>
+            <a:normAutofit fontScale="92500"/>
+          </a:bodyPr>
+          <a:lstStyle/>
+          <a:p>
+            <a:pPr marL="0" lvl="0" indent="0" algn="just" eaLnBrk="0" fontAlgn="base" hangingPunct="0">
+              <a:lnSpc>
+                <a:spcPct val="150000"/>
+              </a:lnSpc>
+              <a:spcBef>
+                <a:spcPct val="0"/>
+              </a:spcBef>
+              <a:spcAft>
+                <a:spcPct val="0"/>
+              </a:spcAft>
+              <a:buFontTx/>
+              <a:buChar char="•"/>
+            </a:pPr>
+            <a:r>
+              <a:rPr lang="en-US" altLang="en-US" dirty="0">
+                <a:latin typeface="Times New Roman" panose="02020603050405020304" pitchFamily="18" charset="0"/>
+                <a:cs typeface="Times New Roman" panose="02020603050405020304" pitchFamily="18" charset="0"/>
+              </a:rPr>
+              <a:t>To automate timetable creation and eliminate inefficiencies and errors caused by manual scheduling.</a:t>
+            </a:r>
+          </a:p>
+          <a:p>
+            <a:pPr marL="0" lvl="0" indent="0" algn="just" eaLnBrk="0" fontAlgn="base" hangingPunct="0">
+              <a:lnSpc>
+                <a:spcPct val="150000"/>
+              </a:lnSpc>
+              <a:spcBef>
+                <a:spcPct val="0"/>
+              </a:spcBef>
+              <a:spcAft>
+                <a:spcPct val="0"/>
+              </a:spcAft>
+              <a:buFontTx/>
+              <a:buChar char="•"/>
+            </a:pPr>
+            <a:r>
+              <a:rPr lang="en-US" altLang="en-US" dirty="0">
+                <a:latin typeface="Times New Roman" panose="02020603050405020304" pitchFamily="18" charset="0"/>
+                <a:cs typeface="Times New Roman" panose="02020603050405020304" pitchFamily="18" charset="0"/>
+              </a:rPr>
+              <a:t>To use a Genetic Algorithm to optimize course and faculty allocation while satisfying hard constraints and minimizing soft constraint violations.</a:t>
+            </a:r>
+          </a:p>
+          <a:p>
+            <a:pPr marL="0" lvl="0" indent="0" algn="just" eaLnBrk="0" fontAlgn="base" hangingPunct="0">
+              <a:lnSpc>
+                <a:spcPct val="150000"/>
+              </a:lnSpc>
+              <a:spcBef>
+                <a:spcPct val="0"/>
+              </a:spcBef>
+              <a:spcAft>
+                <a:spcPct val="0"/>
+              </a:spcAft>
+              <a:buFontTx/>
+              <a:buChar char="•"/>
+            </a:pPr>
+            <a:r>
+              <a:rPr lang="en-US" altLang="en-US" dirty="0">
+                <a:latin typeface="Times New Roman" panose="02020603050405020304" pitchFamily="18" charset="0"/>
+                <a:cs typeface="Times New Roman" panose="02020603050405020304" pitchFamily="18" charset="0"/>
+              </a:rPr>
+              <a:t>To provide a user-friendly interface for easy data input, schedule modification, and timetable visualization.</a:t>
+            </a:r>
+          </a:p>
+          <a:p>
+            <a:pPr marL="0" lvl="0" indent="0" algn="just" eaLnBrk="0" fontAlgn="base" hangingPunct="0">
+              <a:lnSpc>
+                <a:spcPct val="150000"/>
+              </a:lnSpc>
+              <a:spcBef>
+                <a:spcPct val="0"/>
+              </a:spcBef>
+              <a:spcAft>
+                <a:spcPct val="0"/>
+              </a:spcAft>
+              <a:buFontTx/>
+              <a:buChar char="•"/>
+            </a:pPr>
+            <a:r>
+              <a:rPr lang="en-US" altLang="en-US" dirty="0">
+                <a:latin typeface="Times New Roman" panose="02020603050405020304" pitchFamily="18" charset="0"/>
+                <a:cs typeface="Times New Roman" panose="02020603050405020304" pitchFamily="18" charset="0"/>
+              </a:rPr>
+              <a:t>To ensure accurate and reliable timetable generation through validation checks and conflict detection mechanisms.</a:t>
+            </a:r>
+          </a:p>
+          <a:p>
+            <a:pPr marL="0" lvl="0" indent="0" algn="just" eaLnBrk="0" fontAlgn="base" hangingPunct="0">
+              <a:lnSpc>
+                <a:spcPct val="150000"/>
+              </a:lnSpc>
+              <a:spcBef>
+                <a:spcPct val="0"/>
+              </a:spcBef>
+              <a:spcAft>
+                <a:spcPct val="0"/>
+              </a:spcAft>
+              <a:buFontTx/>
+              <a:buChar char="•"/>
+            </a:pPr>
+            <a:endParaRPr lang="en-US" altLang="en-US" dirty="0">
+              <a:latin typeface="Times New Roman" panose="02020603050405020304" pitchFamily="18" charset="0"/>
+              <a:cs typeface="Times New Roman" panose="02020603050405020304" pitchFamily="18" charset="0"/>
+            </a:endParaRPr>
+          </a:p>
+          <a:p>
+            <a:pPr marL="0" lvl="0" indent="0" algn="just" eaLnBrk="0" fontAlgn="base" hangingPunct="0">
+              <a:lnSpc>
+                <a:spcPct val="150000"/>
+              </a:lnSpc>
+              <a:spcBef>
+                <a:spcPct val="0"/>
+              </a:spcBef>
+              <a:spcAft>
+                <a:spcPct val="0"/>
+              </a:spcAft>
+              <a:buFontTx/>
+              <a:buChar char="•"/>
+            </a:pPr>
+            <a:endParaRPr lang="en-US" altLang="en-US" dirty="0">
+              <a:latin typeface="Times New Roman" panose="02020603050405020304" pitchFamily="18" charset="0"/>
+              <a:cs typeface="Times New Roman" panose="02020603050405020304" pitchFamily="18" charset="0"/>
+            </a:endParaRPr>
+          </a:p>
+          <a:p>
+            <a:pPr algn="just">
+              <a:lnSpc>
+                <a:spcPct val="150000"/>
+              </a:lnSpc>
+            </a:pPr>
+            <a:endParaRPr lang="en-IN" dirty="0">
+              <a:latin typeface="Times New Roman" panose="02020603050405020304" pitchFamily="18" charset="0"/>
+              <a:cs typeface="Times New Roman" panose="02020603050405020304" pitchFamily="18" charset="0"/>
+            </a:endParaRPr>
           </a:p>
         </p:txBody>
       </p:sp>
@@ -5615,7 +6899,13 @@
   <p:cSld>
     <p:spTree>
       <p:nvGrpSpPr>
-        <p:cNvPr id="1" name=""/>
+        <p:cNvPr id="1" name="">
+          <a:extLst>
+            <a:ext uri="{FF2B5EF4-FFF2-40B4-BE49-F238E27FC236}">
+              <a16:creationId xmlns:a16="http://schemas.microsoft.com/office/drawing/2014/main" id="{9D4FB66D-CD0E-B582-D93F-356EC0F41E0B}"/>
+            </a:ext>
+          </a:extLst>
+        </p:cNvPr>
         <p:cNvGrpSpPr/>
         <p:nvPr/>
       </p:nvGrpSpPr>
@@ -5632,7 +6922,7 @@
           <p:cNvPr id="2" name="Title 1">
             <a:extLst>
               <a:ext uri="{FF2B5EF4-FFF2-40B4-BE49-F238E27FC236}">
-                <a16:creationId xmlns:a16="http://schemas.microsoft.com/office/drawing/2014/main" id="{C72B9790-7065-E88F-A651-20A3489F2AEB}"/>
+                <a16:creationId xmlns:a16="http://schemas.microsoft.com/office/drawing/2014/main" id="{5E85A9E5-0D78-2F60-F3BE-520D410469CF}"/>
               </a:ext>
             </a:extLst>
           </p:cNvPr>
@@ -5645,7 +6935,7 @@
         </p:nvSpPr>
         <p:spPr>
           <a:xfrm>
-            <a:off x="548833" y="411423"/>
+            <a:off x="548832" y="412208"/>
             <a:ext cx="10515600" cy="1325563"/>
           </a:xfrm>
         </p:spPr>
@@ -5653,7 +6943,7 @@
           <a:bodyPr/>
           <a:lstStyle/>
           <a:p>
-            <a:pPr marL="571500" indent="-571500">
+            <a:pPr marL="571500" indent="-571500" algn="just">
               <a:buFont typeface="Wingdings" panose="05000000000000000000" pitchFamily="2" charset="2"/>
               <a:buChar char="Ø"/>
             </a:pPr>
@@ -5667,7 +6957,7 @@
                 <a:latin typeface="Times New Roman" panose="02020603050405020304" pitchFamily="18" charset="0"/>
                 <a:cs typeface="Times New Roman" panose="02020603050405020304" pitchFamily="18" charset="0"/>
               </a:rPr>
-              <a:t>Proposed Solution</a:t>
+              <a:t>Problem Statement</a:t>
             </a:r>
           </a:p>
         </p:txBody>
@@ -5677,7 +6967,7 @@
           <p:cNvPr id="3" name="Content Placeholder 2">
             <a:extLst>
               <a:ext uri="{FF2B5EF4-FFF2-40B4-BE49-F238E27FC236}">
-                <a16:creationId xmlns:a16="http://schemas.microsoft.com/office/drawing/2014/main" id="{E1110629-7CFF-0CD0-A7EA-799DD1291E9C}"/>
+                <a16:creationId xmlns:a16="http://schemas.microsoft.com/office/drawing/2014/main" id="{8AB36FC7-3D41-7DB2-B5C9-D973BE8AC6BC}"/>
               </a:ext>
             </a:extLst>
           </p:cNvPr>
@@ -5690,83 +6980,45 @@
         </p:nvSpPr>
         <p:spPr>
           <a:xfrm>
-            <a:off x="344129" y="1736986"/>
-            <a:ext cx="11513574" cy="3837904"/>
+            <a:off x="349045" y="1737771"/>
+            <a:ext cx="11493910" cy="4181766"/>
           </a:xfrm>
         </p:spPr>
         <p:txBody>
           <a:bodyPr>
-            <a:normAutofit/>
+            <a:noAutofit/>
           </a:bodyPr>
           <a:lstStyle/>
           <a:p>
-            <a:pPr algn="just">
+            <a:pPr marL="0" indent="0" algn="just">
               <a:lnSpc>
-                <a:spcPct val="150000"/>
+                <a:spcPct val="160000"/>
               </a:lnSpc>
               <a:buNone/>
             </a:pPr>
             <a:r>
-              <a:rPr lang="en-US" sz="2400" dirty="0">
-                <a:latin typeface="Times New Roman" panose="02020603050405020304" pitchFamily="18" charset="0"/>
-                <a:cs typeface="Times New Roman" panose="02020603050405020304" pitchFamily="18" charset="0"/>
-              </a:rPr>
-              <a:t>	The proposed solution utilizes a Genetic Algorithm (GA) for automatic timetable generation. GA mimics natural selection principles to evolve an optimal timetable by iteratively improving solution. This method ensures:</a:t>
-            </a:r>
-          </a:p>
-          <a:p>
-            <a:pPr lvl="1" algn="just">
-              <a:lnSpc>
-                <a:spcPct val="150000"/>
-              </a:lnSpc>
-            </a:pPr>
-            <a:r>
-              <a:rPr lang="en-US" dirty="0">
-                <a:latin typeface="Times New Roman" panose="02020603050405020304" pitchFamily="18" charset="0"/>
-                <a:cs typeface="Times New Roman" panose="02020603050405020304" pitchFamily="18" charset="0"/>
-              </a:rPr>
-              <a:t>Minimized timetable conflicts.</a:t>
-            </a:r>
-          </a:p>
-          <a:p>
-            <a:pPr lvl="1" algn="just">
-              <a:lnSpc>
-                <a:spcPct val="150000"/>
-              </a:lnSpc>
-            </a:pPr>
-            <a:r>
-              <a:rPr lang="en-US" dirty="0">
-                <a:latin typeface="Times New Roman" panose="02020603050405020304" pitchFamily="18" charset="0"/>
-                <a:cs typeface="Times New Roman" panose="02020603050405020304" pitchFamily="18" charset="0"/>
-              </a:rPr>
-              <a:t>Optimal utilization of resources (classrooms, faculty, and time slots).</a:t>
-            </a:r>
-          </a:p>
-          <a:p>
-            <a:pPr lvl="1" algn="just">
-              <a:lnSpc>
-                <a:spcPct val="150000"/>
-              </a:lnSpc>
-            </a:pPr>
-            <a:r>
-              <a:rPr lang="en-US" dirty="0">
-                <a:latin typeface="Times New Roman" panose="02020603050405020304" pitchFamily="18" charset="0"/>
-                <a:cs typeface="Times New Roman" panose="02020603050405020304" pitchFamily="18" charset="0"/>
-              </a:rPr>
-              <a:t>Reduction in human intervention and errors.</a:t>
-            </a:r>
-          </a:p>
-          <a:p>
-            <a:pPr algn="just">
-              <a:lnSpc>
-                <a:spcPct val="150000"/>
-              </a:lnSpc>
-            </a:pPr>
-            <a:endParaRPr lang="en-IN" sz="2400" dirty="0">
+              <a:rPr lang="en-US" sz="2600" dirty="0">
+                <a:latin typeface="Times New Roman" panose="02020603050405020304" pitchFamily="18" charset="0"/>
+                <a:cs typeface="Times New Roman" panose="02020603050405020304" pitchFamily="18" charset="0"/>
+              </a:rPr>
+              <a:t>Timetable scheduling is an essential administrative activity in educational institutions that involves coordinating faculty, courses, and class schedules. As academic structures become more complex, effective scheduling plays a crucial role in ensuring smooth institutional functioning. To support this requirement, the Web-Based Automatic Timetable Scheduler provides a centralized and automated platform for generating academic timetables in an efficient and organized manner.</a:t>
+            </a:r>
+            <a:endParaRPr lang="en-IN" sz="2600" dirty="0">
               <a:latin typeface="Times New Roman" panose="02020603050405020304" pitchFamily="18" charset="0"/>
               <a:cs typeface="Times New Roman" panose="02020603050405020304" pitchFamily="18" charset="0"/>
             </a:endParaRPr>
           </a:p>
+          <a:p>
+            <a:pPr algn="just">
+              <a:lnSpc>
+                <a:spcPct val="160000"/>
+              </a:lnSpc>
+            </a:pPr>
+            <a:endParaRPr lang="en-IN" sz="2600" dirty="0">
+              <a:latin typeface="Times New Roman" panose="02020603050405020304" pitchFamily="18" charset="0"/>
+              <a:cs typeface="Times New Roman" panose="02020603050405020304" pitchFamily="18" charset="0"/>
+            </a:endParaRPr>
+          </a:p>
         </p:txBody>
       </p:sp>
       <p:sp>
@@ -5774,7 +7026,7 @@
           <p:cNvPr id="8" name="Slide Number Placeholder 7">
             <a:extLst>
               <a:ext uri="{FF2B5EF4-FFF2-40B4-BE49-F238E27FC236}">
-                <a16:creationId xmlns:a16="http://schemas.microsoft.com/office/drawing/2014/main" id="{EFDB9BE3-73BF-04CF-0122-C78DE668ED19}"/>
+                <a16:creationId xmlns:a16="http://schemas.microsoft.com/office/drawing/2014/main" id="{7A69E169-0785-863C-50E6-B26BFB1E4040}"/>
               </a:ext>
             </a:extLst>
           </p:cNvPr>
@@ -5801,7 +7053,7 @@
     </p:spTree>
     <p:extLst>
       <p:ext uri="{BB962C8B-B14F-4D97-AF65-F5344CB8AC3E}">
-        <p14:creationId xmlns:p14="http://schemas.microsoft.com/office/powerpoint/2010/main" val="2248465735"/>
+        <p14:creationId xmlns:p14="http://schemas.microsoft.com/office/powerpoint/2010/main" val="73038067"/>
       </p:ext>
     </p:extLst>
   </p:cSld>
@@ -5833,7 +7085,7 @@
           <p:cNvPr id="2" name="Title 1">
             <a:extLst>
               <a:ext uri="{FF2B5EF4-FFF2-40B4-BE49-F238E27FC236}">
-                <a16:creationId xmlns:a16="http://schemas.microsoft.com/office/drawing/2014/main" id="{CC3C47C7-228C-0586-A0DB-47FFEE638757}"/>
+                <a16:creationId xmlns:a16="http://schemas.microsoft.com/office/drawing/2014/main" id="{C72B9790-7065-E88F-A651-20A3489F2AEB}"/>
               </a:ext>
             </a:extLst>
           </p:cNvPr>
@@ -5846,7 +7098,7 @@
         </p:nvSpPr>
         <p:spPr>
           <a:xfrm>
-            <a:off x="548833" y="399849"/>
+            <a:off x="548833" y="411423"/>
             <a:ext cx="10515600" cy="1325563"/>
           </a:xfrm>
         </p:spPr>
@@ -5859,7 +7111,7 @@
               <a:buChar char="Ø"/>
             </a:pPr>
             <a:r>
-              <a:rPr lang="en-US" dirty="0">
+              <a:rPr lang="en-IN" dirty="0">
                 <a:solidFill>
                   <a:schemeClr val="accent1">
                     <a:lumMod val="75000"/>
@@ -5868,14 +7120,67 @@
                 <a:latin typeface="Times New Roman" panose="02020603050405020304" pitchFamily="18" charset="0"/>
                 <a:cs typeface="Times New Roman" panose="02020603050405020304" pitchFamily="18" charset="0"/>
               </a:rPr>
-              <a:t>Methodology</a:t>
-            </a:r>
-            <a:endParaRPr lang="en-IN" dirty="0">
-              <a:solidFill>
-                <a:schemeClr val="accent1">
-                  <a:lumMod val="75000"/>
-                </a:schemeClr>
-              </a:solidFill>
+              <a:t>Proposed Solution</a:t>
+            </a:r>
+          </a:p>
+        </p:txBody>
+      </p:sp>
+      <p:sp>
+        <p:nvSpPr>
+          <p:cNvPr id="3" name="Content Placeholder 2">
+            <a:extLst>
+              <a:ext uri="{FF2B5EF4-FFF2-40B4-BE49-F238E27FC236}">
+                <a16:creationId xmlns:a16="http://schemas.microsoft.com/office/drawing/2014/main" id="{E1110629-7CFF-0CD0-A7EA-799DD1291E9C}"/>
+              </a:ext>
+            </a:extLst>
+          </p:cNvPr>
+          <p:cNvSpPr>
+            <a:spLocks noGrp="1"/>
+          </p:cNvSpPr>
+          <p:nvPr>
+            <p:ph idx="1"/>
+          </p:nvPr>
+        </p:nvSpPr>
+        <p:spPr>
+          <a:xfrm>
+            <a:off x="344129" y="1736985"/>
+            <a:ext cx="11513574" cy="4709592"/>
+          </a:xfrm>
+        </p:spPr>
+        <p:txBody>
+          <a:bodyPr>
+            <a:normAutofit fontScale="25000" lnSpcReduction="20000"/>
+          </a:bodyPr>
+          <a:lstStyle/>
+          <a:p>
+            <a:pPr marL="0" indent="0" algn="just">
+              <a:lnSpc>
+                <a:spcPct val="170000"/>
+              </a:lnSpc>
+              <a:buNone/>
+            </a:pPr>
+            <a:r>
+              <a:rPr lang="en-US" sz="10400" dirty="0">
+                <a:latin typeface="Times New Roman" panose="02020603050405020304" pitchFamily="18" charset="0"/>
+                <a:cs typeface="Times New Roman" panose="02020603050405020304" pitchFamily="18" charset="0"/>
+              </a:rPr>
+              <a:t>The proposed solution is a Web-Based Automatic Timetable Scheduler designed to automate the process of academic timetable generation. The system uses a Genetic Algorithm to produce optimized and conflict-free timetables based on predefined academic constraints such as faculty availability, course requirements, and lab allocations. Through a user-friendly web interface, administrators can easily manage academic data and generate timetables efficiently. The solution minimizes manual effort, improves scheduling accuracy, and provides flexibility to handle institutional scheduling needs</a:t>
+            </a:r>
+            <a:r>
+              <a:rPr lang="en-US" sz="4700" dirty="0">
+                <a:latin typeface="Times New Roman" panose="02020603050405020304" pitchFamily="18" charset="0"/>
+                <a:cs typeface="Times New Roman" panose="02020603050405020304" pitchFamily="18" charset="0"/>
+              </a:rPr>
+              <a:t>.</a:t>
+            </a:r>
+          </a:p>
+          <a:p>
+            <a:pPr algn="just">
+              <a:lnSpc>
+                <a:spcPct val="170000"/>
+              </a:lnSpc>
+            </a:pPr>
+            <a:endParaRPr lang="en-IN" sz="2400" dirty="0">
               <a:latin typeface="Times New Roman" panose="02020603050405020304" pitchFamily="18" charset="0"/>
               <a:cs typeface="Times New Roman" panose="02020603050405020304" pitchFamily="18" charset="0"/>
             </a:endParaRPr>
@@ -5884,169 +7189,10 @@
       </p:sp>
       <p:sp>
         <p:nvSpPr>
-          <p:cNvPr id="3" name="Content Placeholder 2">
-            <a:extLst>
-              <a:ext uri="{FF2B5EF4-FFF2-40B4-BE49-F238E27FC236}">
-                <a16:creationId xmlns:a16="http://schemas.microsoft.com/office/drawing/2014/main" id="{C950621D-BE4A-93C6-9FA2-B5DFCA8A0C98}"/>
-              </a:ext>
-            </a:extLst>
-          </p:cNvPr>
-          <p:cNvSpPr>
-            <a:spLocks noGrp="1"/>
-          </p:cNvSpPr>
-          <p:nvPr>
-            <p:ph idx="1"/>
-          </p:nvPr>
-        </p:nvSpPr>
-        <p:spPr>
-          <a:xfrm>
-            <a:off x="353074" y="1769508"/>
-            <a:ext cx="11485851" cy="4351338"/>
-          </a:xfrm>
-        </p:spPr>
-        <p:txBody>
-          <a:bodyPr>
-            <a:noAutofit/>
-          </a:bodyPr>
-          <a:lstStyle/>
-          <a:p>
-            <a:pPr algn="just"/>
-            <a:r>
-              <a:rPr lang="en-US" sz="2400" b="1" dirty="0">
-                <a:latin typeface="Times New Roman" panose="02020603050405020304" pitchFamily="18" charset="0"/>
-                <a:cs typeface="Times New Roman" panose="02020603050405020304" pitchFamily="18" charset="0"/>
-              </a:rPr>
-              <a:t>Design and Development</a:t>
-            </a:r>
-            <a:r>
-              <a:rPr lang="en-US" sz="2400" dirty="0">
-                <a:latin typeface="Times New Roman" panose="02020603050405020304" pitchFamily="18" charset="0"/>
-                <a:cs typeface="Times New Roman" panose="02020603050405020304" pitchFamily="18" charset="0"/>
-              </a:rPr>
-              <a:t>:</a:t>
-            </a:r>
-          </a:p>
-          <a:p>
-            <a:pPr lvl="1" algn="just"/>
-            <a:r>
-              <a:rPr lang="en-US" dirty="0">
-                <a:latin typeface="Times New Roman" panose="02020603050405020304" pitchFamily="18" charset="0"/>
-                <a:cs typeface="Times New Roman" panose="02020603050405020304" pitchFamily="18" charset="0"/>
-              </a:rPr>
-              <a:t>User friendly interface for timetable generation.</a:t>
-            </a:r>
-          </a:p>
-          <a:p>
-            <a:pPr lvl="1" algn="just"/>
-            <a:r>
-              <a:rPr lang="en-US" dirty="0">
-                <a:latin typeface="Times New Roman" panose="02020603050405020304" pitchFamily="18" charset="0"/>
-                <a:cs typeface="Times New Roman" panose="02020603050405020304" pitchFamily="18" charset="0"/>
-              </a:rPr>
-              <a:t>Using basic </a:t>
-            </a:r>
-            <a:r>
-              <a:rPr lang="en-US" dirty="0" err="1">
-                <a:latin typeface="Times New Roman" panose="02020603050405020304" pitchFamily="18" charset="0"/>
-                <a:cs typeface="Times New Roman" panose="02020603050405020304" pitchFamily="18" charset="0"/>
-              </a:rPr>
-              <a:t>Streamlit</a:t>
-            </a:r>
-            <a:r>
-              <a:rPr lang="en-US" dirty="0">
-                <a:latin typeface="Times New Roman" panose="02020603050405020304" pitchFamily="18" charset="0"/>
-                <a:cs typeface="Times New Roman" panose="02020603050405020304" pitchFamily="18" charset="0"/>
-              </a:rPr>
-              <a:t> , Python and other </a:t>
-            </a:r>
-            <a:r>
-              <a:rPr lang="en-US" dirty="0" err="1">
-                <a:latin typeface="Times New Roman" panose="02020603050405020304" pitchFamily="18" charset="0"/>
-                <a:cs typeface="Times New Roman" panose="02020603050405020304" pitchFamily="18" charset="0"/>
-              </a:rPr>
-              <a:t>PyPi</a:t>
-            </a:r>
-            <a:r>
-              <a:rPr lang="en-US" dirty="0">
-                <a:latin typeface="Times New Roman" panose="02020603050405020304" pitchFamily="18" charset="0"/>
-                <a:cs typeface="Times New Roman" panose="02020603050405020304" pitchFamily="18" charset="0"/>
-              </a:rPr>
-              <a:t> libraries for development.</a:t>
-            </a:r>
-          </a:p>
-          <a:p>
-            <a:pPr lvl="1" algn="just"/>
-            <a:r>
-              <a:rPr lang="en-US" dirty="0">
-                <a:latin typeface="Times New Roman" panose="02020603050405020304" pitchFamily="18" charset="0"/>
-                <a:cs typeface="Times New Roman" panose="02020603050405020304" pitchFamily="18" charset="0"/>
-              </a:rPr>
-              <a:t>Streamlined workflow and Database Designing.</a:t>
-            </a:r>
-          </a:p>
-          <a:p>
-            <a:pPr algn="just"/>
-            <a:r>
-              <a:rPr lang="en-US" sz="2400" b="1" dirty="0">
-                <a:latin typeface="Times New Roman" panose="02020603050405020304" pitchFamily="18" charset="0"/>
-                <a:cs typeface="Times New Roman" panose="02020603050405020304" pitchFamily="18" charset="0"/>
-              </a:rPr>
-              <a:t>Deployment</a:t>
-            </a:r>
-            <a:r>
-              <a:rPr lang="en-US" sz="2400" dirty="0">
-                <a:latin typeface="Times New Roman" panose="02020603050405020304" pitchFamily="18" charset="0"/>
-                <a:cs typeface="Times New Roman" panose="02020603050405020304" pitchFamily="18" charset="0"/>
-              </a:rPr>
-              <a:t>:</a:t>
-            </a:r>
-          </a:p>
-          <a:p>
-            <a:pPr lvl="1" algn="just"/>
-            <a:r>
-              <a:rPr lang="en-US" dirty="0">
-                <a:latin typeface="Times New Roman" panose="02020603050405020304" pitchFamily="18" charset="0"/>
-                <a:cs typeface="Times New Roman" panose="02020603050405020304" pitchFamily="18" charset="0"/>
-              </a:rPr>
-              <a:t>Deploying the System in the Server / Cloud platform (</a:t>
-            </a:r>
-            <a:r>
-              <a:rPr lang="en-US" dirty="0" err="1">
-                <a:latin typeface="Times New Roman" panose="02020603050405020304" pitchFamily="18" charset="0"/>
-                <a:cs typeface="Times New Roman" panose="02020603050405020304" pitchFamily="18" charset="0"/>
-              </a:rPr>
-              <a:t>Streamlit</a:t>
-            </a:r>
-            <a:r>
-              <a:rPr lang="en-US" dirty="0">
-                <a:latin typeface="Times New Roman" panose="02020603050405020304" pitchFamily="18" charset="0"/>
-                <a:cs typeface="Times New Roman" panose="02020603050405020304" pitchFamily="18" charset="0"/>
-              </a:rPr>
-              <a:t> web app)</a:t>
-            </a:r>
-          </a:p>
-          <a:p>
-            <a:pPr lvl="1" algn="just"/>
-            <a:r>
-              <a:rPr lang="en-US" dirty="0">
-                <a:latin typeface="Times New Roman" panose="02020603050405020304" pitchFamily="18" charset="0"/>
-                <a:cs typeface="Times New Roman" panose="02020603050405020304" pitchFamily="18" charset="0"/>
-              </a:rPr>
-              <a:t>GitHub for managing the Code.</a:t>
-            </a:r>
-            <a:endParaRPr lang="en-IN" dirty="0">
-              <a:latin typeface="Times New Roman" panose="02020603050405020304" pitchFamily="18" charset="0"/>
-              <a:cs typeface="Times New Roman" panose="02020603050405020304" pitchFamily="18" charset="0"/>
-            </a:endParaRPr>
-          </a:p>
-        </p:txBody>
-      </p:sp>
-      <p:sp>
-        <p:nvSpPr>
           <p:cNvPr id="8" name="Slide Number Placeholder 7">
             <a:extLst>
               <a:ext uri="{FF2B5EF4-FFF2-40B4-BE49-F238E27FC236}">
-                <a16:creationId xmlns:a16="http://schemas.microsoft.com/office/drawing/2014/main" id="{8653F594-5A14-BC95-78E4-2E32BD5CD09C}"/>
+                <a16:creationId xmlns:a16="http://schemas.microsoft.com/office/drawing/2014/main" id="{EFDB9BE3-73BF-04CF-0122-C78DE668ED19}"/>
               </a:ext>
             </a:extLst>
           </p:cNvPr>
@@ -6073,7 +7219,7 @@
     </p:spTree>
     <p:extLst>
       <p:ext uri="{BB962C8B-B14F-4D97-AF65-F5344CB8AC3E}">
-        <p14:creationId xmlns:p14="http://schemas.microsoft.com/office/powerpoint/2010/main" val="563370002"/>
+        <p14:creationId xmlns:p14="http://schemas.microsoft.com/office/powerpoint/2010/main" val="2248465735"/>
       </p:ext>
     </p:extLst>
   </p:cSld>
@@ -6105,7 +7251,7 @@
           <p:cNvPr id="2" name="Title 1">
             <a:extLst>
               <a:ext uri="{FF2B5EF4-FFF2-40B4-BE49-F238E27FC236}">
-                <a16:creationId xmlns:a16="http://schemas.microsoft.com/office/drawing/2014/main" id="{977A1AF5-3EB8-FCA3-B05C-F14BB5A9992E}"/>
+                <a16:creationId xmlns:a16="http://schemas.microsoft.com/office/drawing/2014/main" id="{CC3C47C7-228C-0586-A0DB-47FFEE638757}"/>
               </a:ext>
             </a:extLst>
           </p:cNvPr>
@@ -6118,7 +7264,7 @@
         </p:nvSpPr>
         <p:spPr>
           <a:xfrm>
-            <a:off x="548832" y="399850"/>
+            <a:off x="548833" y="399849"/>
             <a:ext cx="10515600" cy="1325563"/>
           </a:xfrm>
         </p:spPr>
@@ -6131,7 +7277,7 @@
               <a:buChar char="Ø"/>
             </a:pPr>
             <a:r>
-              <a:rPr lang="en-IN" dirty="0">
+              <a:rPr lang="en-US" dirty="0">
                 <a:solidFill>
                   <a:schemeClr val="accent1">
                     <a:lumMod val="75000"/>
@@ -6140,8 +7286,76 @@
                 <a:latin typeface="Times New Roman" panose="02020603050405020304" pitchFamily="18" charset="0"/>
                 <a:cs typeface="Times New Roman" panose="02020603050405020304" pitchFamily="18" charset="0"/>
               </a:rPr>
-              <a:t>Flow Chart</a:t>
-            </a:r>
+              <a:t>Methodology</a:t>
+            </a:r>
+            <a:endParaRPr lang="en-IN" dirty="0">
+              <a:solidFill>
+                <a:schemeClr val="accent1">
+                  <a:lumMod val="75000"/>
+                </a:schemeClr>
+              </a:solidFill>
+              <a:latin typeface="Times New Roman" panose="02020603050405020304" pitchFamily="18" charset="0"/>
+              <a:cs typeface="Times New Roman" panose="02020603050405020304" pitchFamily="18" charset="0"/>
+            </a:endParaRPr>
+          </a:p>
+        </p:txBody>
+      </p:sp>
+      <p:sp>
+        <p:nvSpPr>
+          <p:cNvPr id="3" name="Content Placeholder 2">
+            <a:extLst>
+              <a:ext uri="{FF2B5EF4-FFF2-40B4-BE49-F238E27FC236}">
+                <a16:creationId xmlns:a16="http://schemas.microsoft.com/office/drawing/2014/main" id="{C950621D-BE4A-93C6-9FA2-B5DFCA8A0C98}"/>
+              </a:ext>
+            </a:extLst>
+          </p:cNvPr>
+          <p:cNvSpPr>
+            <a:spLocks noGrp="1"/>
+          </p:cNvSpPr>
+          <p:nvPr>
+            <p:ph idx="1"/>
+          </p:nvPr>
+        </p:nvSpPr>
+        <p:spPr>
+          <a:xfrm>
+            <a:off x="353074" y="1769508"/>
+            <a:ext cx="11485851" cy="4351338"/>
+          </a:xfrm>
+        </p:spPr>
+        <p:txBody>
+          <a:bodyPr>
+            <a:noAutofit/>
+          </a:bodyPr>
+          <a:lstStyle/>
+          <a:p>
+            <a:pPr marL="0" indent="0" algn="just">
+              <a:lnSpc>
+                <a:spcPct val="150000"/>
+              </a:lnSpc>
+              <a:buNone/>
+            </a:pPr>
+            <a:r>
+              <a:rPr lang="en-US" sz="2600" dirty="0">
+                <a:latin typeface="Times New Roman" panose="02020603050405020304" pitchFamily="18" charset="0"/>
+                <a:cs typeface="Times New Roman" panose="02020603050405020304" pitchFamily="18" charset="0"/>
+              </a:rPr>
+              <a:t>The methodology followed here begins with collecting academic data such as departments, courses, faculty details, and availability preferences through a web-based interface. This data is processed using a Genetic Algorithm, which generates multiple timetable solutions and iteratively improves them by minimizing conflicts and satisfying scheduling constraints. The best solution is selected based on fitness evaluation and presented as the final timetable, ensuring efficiency and accuracy in scheduling.</a:t>
+            </a:r>
+            <a:endParaRPr lang="en-IN" sz="2600" dirty="0">
+              <a:latin typeface="Times New Roman" panose="02020603050405020304" pitchFamily="18" charset="0"/>
+              <a:cs typeface="Times New Roman" panose="02020603050405020304" pitchFamily="18" charset="0"/>
+            </a:endParaRPr>
+          </a:p>
+          <a:p>
+            <a:pPr algn="just">
+              <a:lnSpc>
+                <a:spcPct val="150000"/>
+              </a:lnSpc>
+            </a:pPr>
+            <a:endParaRPr lang="en-IN" sz="2600" dirty="0">
+              <a:latin typeface="Times New Roman" panose="02020603050405020304" pitchFamily="18" charset="0"/>
+              <a:cs typeface="Times New Roman" panose="02020603050405020304" pitchFamily="18" charset="0"/>
+            </a:endParaRPr>
           </a:p>
         </p:txBody>
       </p:sp>
@@ -6150,7 +7364,7 @@
           <p:cNvPr id="8" name="Slide Number Placeholder 7">
             <a:extLst>
               <a:ext uri="{FF2B5EF4-FFF2-40B4-BE49-F238E27FC236}">
-                <a16:creationId xmlns:a16="http://schemas.microsoft.com/office/drawing/2014/main" id="{6CBD0871-B522-D837-0C12-CC593055CE70}"/>
+                <a16:creationId xmlns:a16="http://schemas.microsoft.com/office/drawing/2014/main" id="{8653F594-5A14-BC95-78E4-2E32BD5CD09C}"/>
               </a:ext>
             </a:extLst>
           </p:cNvPr>
@@ -6170,92 +7384,14 @@
               <a:rPr lang="en-IN" smtClean="0"/>
               <a:t>6</a:t>
             </a:fld>
-            <a:endParaRPr lang="en-IN" dirty="0"/>
-          </a:p>
-        </p:txBody>
-      </p:sp>
-      <p:pic>
-        <p:nvPicPr>
-          <p:cNvPr id="3" name="Picture 2">
-            <a:extLst>
-              <a:ext uri="{FF2B5EF4-FFF2-40B4-BE49-F238E27FC236}">
-                <a16:creationId xmlns:a16="http://schemas.microsoft.com/office/drawing/2014/main" id="{87C33F19-CCBE-AE8D-168A-079A8BEAAA1D}"/>
-              </a:ext>
-            </a:extLst>
-          </p:cNvPr>
-          <p:cNvPicPr>
-            <a:picLocks noChangeAspect="1"/>
-          </p:cNvPicPr>
-          <p:nvPr/>
-        </p:nvPicPr>
-        <p:blipFill>
-          <a:blip r:embed="rId2">
-            <a:extLst>
-              <a:ext uri="{28A0092B-C50C-407E-A947-70E740481C1C}">
-                <a14:useLocalDpi xmlns:a14="http://schemas.microsoft.com/office/drawing/2010/main" val="0"/>
-              </a:ext>
-            </a:extLst>
-          </a:blip>
-          <a:stretch>
-            <a:fillRect/>
-          </a:stretch>
-        </p:blipFill>
-        <p:spPr>
-          <a:xfrm>
-            <a:off x="4328335" y="706766"/>
-            <a:ext cx="3380155" cy="5283920"/>
-          </a:xfrm>
-          <a:prstGeom prst="rect">
-            <a:avLst/>
-          </a:prstGeom>
-        </p:spPr>
-      </p:pic>
-      <p:sp>
-        <p:nvSpPr>
-          <p:cNvPr id="4" name="TextBox 3">
-            <a:extLst>
-              <a:ext uri="{FF2B5EF4-FFF2-40B4-BE49-F238E27FC236}">
-                <a16:creationId xmlns:a16="http://schemas.microsoft.com/office/drawing/2014/main" id="{31E2A8DF-9746-CE40-E494-C3EB87603BD3}"/>
-              </a:ext>
-            </a:extLst>
-          </p:cNvPr>
-          <p:cNvSpPr txBox="1"/>
-          <p:nvPr/>
-        </p:nvSpPr>
-        <p:spPr>
-          <a:xfrm>
-            <a:off x="1789471" y="6048488"/>
-            <a:ext cx="8613058" cy="646331"/>
-          </a:xfrm>
-          <a:prstGeom prst="rect">
-            <a:avLst/>
-          </a:prstGeom>
-          <a:noFill/>
-        </p:spPr>
-        <p:txBody>
-          <a:bodyPr wrap="square" rtlCol="0">
-            <a:spAutoFit/>
-          </a:bodyPr>
-          <a:lstStyle/>
-          <a:p>
-            <a:r>
-              <a:rPr lang="en-US" b="1" dirty="0">
-                <a:latin typeface="Times New Roman" panose="02020603050405020304" pitchFamily="18" charset="0"/>
-                <a:cs typeface="Times New Roman" panose="02020603050405020304" pitchFamily="18" charset="0"/>
-              </a:rPr>
-              <a:t>Figure : The flowchart visually represents the automated timetable generation process using a Genetic Algorithm.</a:t>
-            </a:r>
-            <a:endParaRPr lang="en-IN" b="1" dirty="0">
-              <a:latin typeface="Times New Roman" panose="02020603050405020304" pitchFamily="18" charset="0"/>
-              <a:cs typeface="Times New Roman" panose="02020603050405020304" pitchFamily="18" charset="0"/>
-            </a:endParaRPr>
+            <a:endParaRPr lang="en-IN"/>
           </a:p>
         </p:txBody>
       </p:sp>
     </p:spTree>
     <p:extLst>
       <p:ext uri="{BB962C8B-B14F-4D97-AF65-F5344CB8AC3E}">
-        <p14:creationId xmlns:p14="http://schemas.microsoft.com/office/powerpoint/2010/main" val="2562333690"/>
+        <p14:creationId xmlns:p14="http://schemas.microsoft.com/office/powerpoint/2010/main" val="563370002"/>
       </p:ext>
     </p:extLst>
   </p:cSld>
@@ -6287,7 +7423,7 @@
           <p:cNvPr id="2" name="Title 1">
             <a:extLst>
               <a:ext uri="{FF2B5EF4-FFF2-40B4-BE49-F238E27FC236}">
-                <a16:creationId xmlns:a16="http://schemas.microsoft.com/office/drawing/2014/main" id="{D7800AAC-535A-CA5B-CD60-82440E3F8D60}"/>
+                <a16:creationId xmlns:a16="http://schemas.microsoft.com/office/drawing/2014/main" id="{977A1AF5-3EB8-FCA3-B05C-F14BB5A9992E}"/>
               </a:ext>
             </a:extLst>
           </p:cNvPr>
@@ -6300,7 +7436,7 @@
         </p:nvSpPr>
         <p:spPr>
           <a:xfrm>
-            <a:off x="548834" y="411423"/>
+            <a:off x="548832" y="399850"/>
             <a:ext cx="10515600" cy="1325563"/>
           </a:xfrm>
         </p:spPr>
@@ -6322,211 +7458,8 @@
                 <a:latin typeface="Times New Roman" panose="02020603050405020304" pitchFamily="18" charset="0"/>
                 <a:cs typeface="Times New Roman" panose="02020603050405020304" pitchFamily="18" charset="0"/>
               </a:rPr>
-              <a:t>Requirements</a:t>
-            </a:r>
-          </a:p>
-        </p:txBody>
-      </p:sp>
-      <p:sp>
-        <p:nvSpPr>
-          <p:cNvPr id="3" name="Content Placeholder 2">
-            <a:extLst>
-              <a:ext uri="{FF2B5EF4-FFF2-40B4-BE49-F238E27FC236}">
-                <a16:creationId xmlns:a16="http://schemas.microsoft.com/office/drawing/2014/main" id="{1975CCD3-A117-4C76-F635-F31538082751}"/>
-              </a:ext>
-            </a:extLst>
-          </p:cNvPr>
-          <p:cNvSpPr>
-            <a:spLocks noGrp="1"/>
-          </p:cNvSpPr>
-          <p:nvPr>
-            <p:ph idx="1"/>
-          </p:nvPr>
-        </p:nvSpPr>
-        <p:spPr>
-          <a:xfrm>
-            <a:off x="344129" y="1736986"/>
-            <a:ext cx="10720305" cy="4231195"/>
-          </a:xfrm>
-        </p:spPr>
-        <p:txBody>
-          <a:bodyPr>
-            <a:normAutofit/>
-          </a:bodyPr>
-          <a:lstStyle/>
-          <a:p>
-            <a:pPr marL="0" indent="0">
-              <a:buNone/>
-            </a:pPr>
-            <a:r>
-              <a:rPr lang="en-US" sz="2400" b="1" dirty="0">
-                <a:latin typeface="Times New Roman" panose="02020603050405020304" pitchFamily="18" charset="0"/>
-                <a:cs typeface="Times New Roman" panose="02020603050405020304" pitchFamily="18" charset="0"/>
-              </a:rPr>
-              <a:t>System Requirements</a:t>
-            </a:r>
-            <a:r>
-              <a:rPr lang="en-US" sz="2400" dirty="0">
-                <a:latin typeface="Times New Roman" panose="02020603050405020304" pitchFamily="18" charset="0"/>
-                <a:cs typeface="Times New Roman" panose="02020603050405020304" pitchFamily="18" charset="0"/>
-              </a:rPr>
-              <a:t>:</a:t>
-            </a:r>
-          </a:p>
-          <a:p>
-            <a:pPr lvl="1"/>
-            <a:r>
-              <a:rPr lang="en-US" dirty="0">
-                <a:latin typeface="Times New Roman" panose="02020603050405020304" pitchFamily="18" charset="0"/>
-                <a:cs typeface="Times New Roman" panose="02020603050405020304" pitchFamily="18" charset="0"/>
-              </a:rPr>
-              <a:t>PC should have </a:t>
-            </a:r>
-            <a:r>
-              <a:rPr lang="en-US" b="0" i="0" dirty="0">
-                <a:solidFill>
-                  <a:schemeClr val="tx1">
-                    <a:lumMod val="95000"/>
-                    <a:lumOff val="5000"/>
-                  </a:schemeClr>
-                </a:solidFill>
-                <a:effectLst/>
-                <a:latin typeface="Times New Roman" panose="02020603050405020304" pitchFamily="18" charset="0"/>
-                <a:cs typeface="Times New Roman" panose="02020603050405020304" pitchFamily="18" charset="0"/>
-              </a:rPr>
-              <a:t>at least 4 GB of RAM,</a:t>
-            </a:r>
-          </a:p>
-          <a:p>
-            <a:pPr lvl="1"/>
-            <a:r>
-              <a:rPr lang="en-IN" b="0" i="0" dirty="0">
-                <a:solidFill>
-                  <a:schemeClr val="tx1">
-                    <a:lumMod val="95000"/>
-                    <a:lumOff val="5000"/>
-                  </a:schemeClr>
-                </a:solidFill>
-                <a:effectLst/>
-                <a:latin typeface="Times New Roman" panose="02020603050405020304" pitchFamily="18" charset="0"/>
-                <a:cs typeface="Times New Roman" panose="02020603050405020304" pitchFamily="18" charset="0"/>
-              </a:rPr>
-              <a:t>Windows 7 and upwards.</a:t>
-            </a:r>
-            <a:endParaRPr lang="en-US" dirty="0">
-              <a:solidFill>
-                <a:schemeClr val="tx1">
-                  <a:lumMod val="95000"/>
-                  <a:lumOff val="5000"/>
-                </a:schemeClr>
-              </a:solidFill>
-              <a:latin typeface="Times New Roman" panose="02020603050405020304" pitchFamily="18" charset="0"/>
-              <a:cs typeface="Times New Roman" panose="02020603050405020304" pitchFamily="18" charset="0"/>
-            </a:endParaRPr>
-          </a:p>
-          <a:p>
-            <a:pPr lvl="1"/>
-            <a:r>
-              <a:rPr lang="en-US" b="0" i="0" dirty="0">
-                <a:solidFill>
-                  <a:schemeClr val="tx1">
-                    <a:lumMod val="95000"/>
-                    <a:lumOff val="5000"/>
-                  </a:schemeClr>
-                </a:solidFill>
-                <a:effectLst/>
-                <a:latin typeface="Times New Roman" panose="02020603050405020304" pitchFamily="18" charset="0"/>
-                <a:cs typeface="Times New Roman" panose="02020603050405020304" pitchFamily="18" charset="0"/>
-              </a:rPr>
-              <a:t>Python version least 3.8 or above.</a:t>
-            </a:r>
-          </a:p>
-          <a:p>
-            <a:pPr lvl="1"/>
-            <a:r>
-              <a:rPr lang="en-US" dirty="0">
-                <a:solidFill>
-                  <a:schemeClr val="tx1">
-                    <a:lumMod val="95000"/>
-                    <a:lumOff val="5000"/>
-                  </a:schemeClr>
-                </a:solidFill>
-                <a:latin typeface="Times New Roman" panose="02020603050405020304" pitchFamily="18" charset="0"/>
-                <a:cs typeface="Times New Roman" panose="02020603050405020304" pitchFamily="18" charset="0"/>
-              </a:rPr>
-              <a:t>SQLite default database.</a:t>
-            </a:r>
-          </a:p>
-          <a:p>
-            <a:pPr lvl="1"/>
-            <a:r>
-              <a:rPr lang="en-US" dirty="0">
-                <a:solidFill>
-                  <a:schemeClr val="tx1">
-                    <a:lumMod val="95000"/>
-                    <a:lumOff val="5000"/>
-                  </a:schemeClr>
-                </a:solidFill>
-                <a:latin typeface="Times New Roman" panose="02020603050405020304" pitchFamily="18" charset="0"/>
-                <a:cs typeface="Times New Roman" panose="02020603050405020304" pitchFamily="18" charset="0"/>
-              </a:rPr>
-              <a:t>Internet access.</a:t>
-            </a:r>
-          </a:p>
-          <a:p>
-            <a:pPr marL="0" indent="0">
-              <a:buNone/>
-            </a:pPr>
-            <a:r>
-              <a:rPr lang="en-US" sz="2400" b="1" dirty="0">
-                <a:latin typeface="Times New Roman" panose="02020603050405020304" pitchFamily="18" charset="0"/>
-                <a:cs typeface="Times New Roman" panose="02020603050405020304" pitchFamily="18" charset="0"/>
-              </a:rPr>
-              <a:t>Project Components</a:t>
-            </a:r>
-            <a:r>
-              <a:rPr lang="en-US" sz="2400" dirty="0">
-                <a:latin typeface="Times New Roman" panose="02020603050405020304" pitchFamily="18" charset="0"/>
-                <a:cs typeface="Times New Roman" panose="02020603050405020304" pitchFamily="18" charset="0"/>
-              </a:rPr>
-              <a:t>: </a:t>
-            </a:r>
-          </a:p>
-          <a:p>
-            <a:pPr lvl="1" algn="just"/>
-            <a:r>
-              <a:rPr lang="en-US" dirty="0">
-                <a:latin typeface="Times New Roman" panose="02020603050405020304" pitchFamily="18" charset="0"/>
-                <a:cs typeface="Times New Roman" panose="02020603050405020304" pitchFamily="18" charset="0"/>
-              </a:rPr>
-              <a:t>Identifying the requirements of the institution.</a:t>
-            </a:r>
-          </a:p>
-          <a:p>
-            <a:pPr lvl="1"/>
-            <a:r>
-              <a:rPr lang="en-US" dirty="0">
-                <a:latin typeface="Times New Roman" panose="02020603050405020304" pitchFamily="18" charset="0"/>
-                <a:cs typeface="Times New Roman" panose="02020603050405020304" pitchFamily="18" charset="0"/>
-              </a:rPr>
-              <a:t>Details about the Faculty, Courses, Classes, Classrooms, Labs.</a:t>
-            </a:r>
-          </a:p>
-          <a:p>
-            <a:pPr lvl="1" algn="just"/>
-            <a:r>
-              <a:rPr lang="en-US" dirty="0">
-                <a:latin typeface="Times New Roman" panose="02020603050405020304" pitchFamily="18" charset="0"/>
-                <a:cs typeface="Times New Roman" panose="02020603050405020304" pitchFamily="18" charset="0"/>
-              </a:rPr>
-              <a:t>Customization of timetable as per the requirements. </a:t>
-            </a:r>
-          </a:p>
-          <a:p>
-            <a:endParaRPr lang="en-IN" dirty="0">
-              <a:latin typeface="Times New Roman" panose="02020603050405020304" pitchFamily="18" charset="0"/>
-              <a:cs typeface="Times New Roman" panose="02020603050405020304" pitchFamily="18" charset="0"/>
-            </a:endParaRPr>
+              <a:t>System Architecture</a:t>
+            </a:r>
           </a:p>
         </p:txBody>
       </p:sp>
@@ -6535,7 +7468,7 @@
           <p:cNvPr id="8" name="Slide Number Placeholder 7">
             <a:extLst>
               <a:ext uri="{FF2B5EF4-FFF2-40B4-BE49-F238E27FC236}">
-                <a16:creationId xmlns:a16="http://schemas.microsoft.com/office/drawing/2014/main" id="{5B431902-F7F1-B6CA-C2B3-0EFECA70F7EC}"/>
+                <a16:creationId xmlns:a16="http://schemas.microsoft.com/office/drawing/2014/main" id="{6CBD0871-B522-D837-0C12-CC593055CE70}"/>
               </a:ext>
             </a:extLst>
           </p:cNvPr>
@@ -6555,14 +7488,234 @@
               <a:rPr lang="en-IN" smtClean="0"/>
               <a:t>7</a:t>
             </a:fld>
-            <a:endParaRPr lang="en-IN"/>
+            <a:endParaRPr lang="en-IN" dirty="0"/>
+          </a:p>
+        </p:txBody>
+      </p:sp>
+      <p:sp>
+        <p:nvSpPr>
+          <p:cNvPr id="4" name="TextBox 3">
+            <a:extLst>
+              <a:ext uri="{FF2B5EF4-FFF2-40B4-BE49-F238E27FC236}">
+                <a16:creationId xmlns:a16="http://schemas.microsoft.com/office/drawing/2014/main" id="{31E2A8DF-9746-CE40-E494-C3EB87603BD3}"/>
+              </a:ext>
+            </a:extLst>
+          </p:cNvPr>
+          <p:cNvSpPr txBox="1"/>
+          <p:nvPr/>
+        </p:nvSpPr>
+        <p:spPr>
+          <a:xfrm>
+            <a:off x="6643869" y="5038159"/>
+            <a:ext cx="5737254" cy="584775"/>
+          </a:xfrm>
+          <a:prstGeom prst="rect">
+            <a:avLst/>
+          </a:prstGeom>
+          <a:noFill/>
+        </p:spPr>
+        <p:txBody>
+          <a:bodyPr wrap="square" rtlCol="0">
+            <a:spAutoFit/>
+          </a:bodyPr>
+          <a:lstStyle/>
+          <a:p>
+            <a:pPr algn="ctr"/>
+            <a:r>
+              <a:rPr lang="en-US" sz="1600" b="1" dirty="0">
+                <a:latin typeface="Times New Roman" panose="02020603050405020304" pitchFamily="18" charset="0"/>
+                <a:cs typeface="Times New Roman" panose="02020603050405020304" pitchFamily="18" charset="0"/>
+              </a:rPr>
+              <a:t>Figure : The System Architecture of Web-based Automatic Timetable Scheduler</a:t>
+            </a:r>
+            <a:endParaRPr lang="en-IN" sz="1600" b="1" dirty="0">
+              <a:latin typeface="Times New Roman" panose="02020603050405020304" pitchFamily="18" charset="0"/>
+              <a:cs typeface="Times New Roman" panose="02020603050405020304" pitchFamily="18" charset="0"/>
+            </a:endParaRPr>
+          </a:p>
+        </p:txBody>
+      </p:sp>
+      <p:pic>
+        <p:nvPicPr>
+          <p:cNvPr id="9" name="Picture 8">
+            <a:extLst>
+              <a:ext uri="{FF2B5EF4-FFF2-40B4-BE49-F238E27FC236}">
+                <a16:creationId xmlns:a16="http://schemas.microsoft.com/office/drawing/2014/main" id="{21395C93-51C3-EF32-2672-E0B595698551}"/>
+              </a:ext>
+            </a:extLst>
+          </p:cNvPr>
+          <p:cNvPicPr>
+            <a:picLocks noChangeAspect="1"/>
+          </p:cNvPicPr>
+          <p:nvPr/>
+        </p:nvPicPr>
+        <p:blipFill>
+          <a:blip r:embed="rId2">
+            <a:extLst>
+              <a:ext uri="{28A0092B-C50C-407E-A947-70E740481C1C}">
+                <a14:useLocalDpi xmlns:a14="http://schemas.microsoft.com/office/drawing/2010/main" val="0"/>
+              </a:ext>
+            </a:extLst>
+          </a:blip>
+          <a:stretch>
+            <a:fillRect/>
+          </a:stretch>
+        </p:blipFill>
+        <p:spPr>
+          <a:xfrm>
+            <a:off x="6857034" y="1388154"/>
+            <a:ext cx="5041337" cy="3501366"/>
+          </a:xfrm>
+          <a:prstGeom prst="rect">
+            <a:avLst/>
+          </a:prstGeom>
+          <a:ln>
+            <a:solidFill>
+              <a:schemeClr val="tx1"/>
+            </a:solidFill>
+          </a:ln>
+        </p:spPr>
+      </p:pic>
+      <p:sp>
+        <p:nvSpPr>
+          <p:cNvPr id="10" name="Content Placeholder 2">
+            <a:extLst>
+              <a:ext uri="{FF2B5EF4-FFF2-40B4-BE49-F238E27FC236}">
+                <a16:creationId xmlns:a16="http://schemas.microsoft.com/office/drawing/2014/main" id="{9C9F0236-5305-10C2-4D2C-732EB5A242E3}"/>
+              </a:ext>
+            </a:extLst>
+          </p:cNvPr>
+          <p:cNvSpPr>
+            <a:spLocks noGrp="1"/>
+          </p:cNvSpPr>
+          <p:nvPr>
+            <p:ph idx="1"/>
+          </p:nvPr>
+        </p:nvSpPr>
+        <p:spPr>
+          <a:xfrm>
+            <a:off x="353074" y="1658367"/>
+            <a:ext cx="6290795" cy="5063108"/>
+          </a:xfrm>
+        </p:spPr>
+        <p:txBody>
+          <a:bodyPr>
+            <a:noAutofit/>
+          </a:bodyPr>
+          <a:lstStyle/>
+          <a:p>
+            <a:pPr algn="just">
+              <a:lnSpc>
+                <a:spcPct val="100000"/>
+              </a:lnSpc>
+            </a:pPr>
+            <a:r>
+              <a:rPr lang="en-US" sz="2000" dirty="0">
+                <a:latin typeface="Times New Roman" panose="02020603050405020304" pitchFamily="18" charset="0"/>
+                <a:cs typeface="Times New Roman" panose="02020603050405020304" pitchFamily="18" charset="0"/>
+              </a:rPr>
+              <a:t>The Architecture follows 3-layered modular approach.</a:t>
+            </a:r>
+          </a:p>
+          <a:p>
+            <a:pPr algn="just">
+              <a:lnSpc>
+                <a:spcPct val="100000"/>
+              </a:lnSpc>
+            </a:pPr>
+            <a:r>
+              <a:rPr lang="en-US" sz="2000" dirty="0">
+                <a:latin typeface="Times New Roman" panose="02020603050405020304" pitchFamily="18" charset="0"/>
+                <a:cs typeface="Times New Roman" panose="02020603050405020304" pitchFamily="18" charset="0"/>
+              </a:rPr>
+              <a:t>User Interface is developed using </a:t>
+            </a:r>
+            <a:r>
+              <a:rPr lang="en-US" sz="2000" dirty="0" err="1">
+                <a:latin typeface="Times New Roman" panose="02020603050405020304" pitchFamily="18" charset="0"/>
+                <a:cs typeface="Times New Roman" panose="02020603050405020304" pitchFamily="18" charset="0"/>
+              </a:rPr>
+              <a:t>Streamlit</a:t>
+            </a:r>
+            <a:r>
+              <a:rPr lang="en-US" sz="2000" dirty="0">
+                <a:latin typeface="Times New Roman" panose="02020603050405020304" pitchFamily="18" charset="0"/>
+                <a:cs typeface="Times New Roman" panose="02020603050405020304" pitchFamily="18" charset="0"/>
+              </a:rPr>
+              <a:t> used for form-based input and data visualization.</a:t>
+            </a:r>
+          </a:p>
+          <a:p>
+            <a:pPr algn="just">
+              <a:lnSpc>
+                <a:spcPct val="100000"/>
+              </a:lnSpc>
+            </a:pPr>
+            <a:r>
+              <a:rPr lang="en-US" sz="2000" dirty="0">
+                <a:latin typeface="Times New Roman" panose="02020603050405020304" pitchFamily="18" charset="0"/>
+                <a:cs typeface="Times New Roman" panose="02020603050405020304" pitchFamily="18" charset="0"/>
+              </a:rPr>
+              <a:t>The Genetic Algorithm serves as the core optimization engine, generating conflict-free timetables by evaluating multiple scheduling solutions. Genetic Algorithm parameters such as population size, crossover rate, mutation rate, and number of generations control the optimization process and influence the quality of the generated timetable.</a:t>
+            </a:r>
+          </a:p>
+          <a:p>
+            <a:pPr>
+              <a:lnSpc>
+                <a:spcPct val="100000"/>
+              </a:lnSpc>
+            </a:pPr>
+            <a:r>
+              <a:rPr lang="en-US" sz="2000" dirty="0">
+                <a:latin typeface="Times New Roman" panose="02020603050405020304" pitchFamily="18" charset="0"/>
+                <a:cs typeface="Times New Roman" panose="02020603050405020304" pitchFamily="18" charset="0"/>
+              </a:rPr>
+              <a:t>Academic and scheduling data is stored and managed using a database.</a:t>
+            </a:r>
+          </a:p>
+          <a:p>
+            <a:pPr>
+              <a:lnSpc>
+                <a:spcPct val="100000"/>
+              </a:lnSpc>
+            </a:pPr>
+            <a:r>
+              <a:rPr lang="en-US" sz="2000" dirty="0">
+                <a:latin typeface="Times New Roman" panose="02020603050405020304" pitchFamily="18" charset="0"/>
+                <a:cs typeface="Times New Roman" panose="02020603050405020304" pitchFamily="18" charset="0"/>
+              </a:rPr>
+              <a:t>The final optimized timetable is generated and displayed to the user through the web interface.</a:t>
+            </a:r>
+          </a:p>
+          <a:p>
+            <a:pPr marL="0" indent="0" algn="just">
+              <a:lnSpc>
+                <a:spcPct val="100000"/>
+              </a:lnSpc>
+              <a:buNone/>
+            </a:pPr>
+            <a:endParaRPr lang="en-IN" sz="2000" dirty="0">
+              <a:latin typeface="Times New Roman" panose="02020603050405020304" pitchFamily="18" charset="0"/>
+              <a:cs typeface="Times New Roman" panose="02020603050405020304" pitchFamily="18" charset="0"/>
+            </a:endParaRPr>
+          </a:p>
+          <a:p>
+            <a:pPr algn="just">
+              <a:lnSpc>
+                <a:spcPct val="100000"/>
+              </a:lnSpc>
+            </a:pPr>
+            <a:endParaRPr lang="en-US" sz="2000" dirty="0">
+              <a:latin typeface="Times New Roman" panose="02020603050405020304" pitchFamily="18" charset="0"/>
+              <a:cs typeface="Times New Roman" panose="02020603050405020304" pitchFamily="18" charset="0"/>
+            </a:endParaRPr>
           </a:p>
         </p:txBody>
       </p:sp>
     </p:spTree>
     <p:extLst>
       <p:ext uri="{BB962C8B-B14F-4D97-AF65-F5344CB8AC3E}">
-        <p14:creationId xmlns:p14="http://schemas.microsoft.com/office/powerpoint/2010/main" val="2635137703"/>
+        <p14:creationId xmlns:p14="http://schemas.microsoft.com/office/powerpoint/2010/main" val="2562333690"/>
       </p:ext>
     </p:extLst>
   </p:cSld>
@@ -6591,10 +7744,100 @@
       </p:grpSpPr>
       <p:sp>
         <p:nvSpPr>
-          <p:cNvPr id="4" name="Slide Number Placeholder 3">
+          <p:cNvPr id="2" name="Title 1">
             <a:extLst>
               <a:ext uri="{FF2B5EF4-FFF2-40B4-BE49-F238E27FC236}">
-                <a16:creationId xmlns:a16="http://schemas.microsoft.com/office/drawing/2014/main" id="{C708CAEA-E1CA-D7A9-8DB5-7DB344C8DAAB}"/>
+                <a16:creationId xmlns:a16="http://schemas.microsoft.com/office/drawing/2014/main" id="{D7800AAC-535A-CA5B-CD60-82440E3F8D60}"/>
+              </a:ext>
+            </a:extLst>
+          </p:cNvPr>
+          <p:cNvSpPr>
+            <a:spLocks noGrp="1"/>
+          </p:cNvSpPr>
+          <p:nvPr>
+            <p:ph type="title"/>
+          </p:nvPr>
+        </p:nvSpPr>
+        <p:spPr>
+          <a:xfrm>
+            <a:off x="548834" y="411423"/>
+            <a:ext cx="10515600" cy="1325563"/>
+          </a:xfrm>
+        </p:spPr>
+        <p:txBody>
+          <a:bodyPr/>
+          <a:lstStyle/>
+          <a:p>
+            <a:pPr marL="571500" indent="-571500">
+              <a:buFont typeface="Wingdings" panose="05000000000000000000" pitchFamily="2" charset="2"/>
+              <a:buChar char="Ø"/>
+            </a:pPr>
+            <a:r>
+              <a:rPr lang="en-IN" dirty="0">
+                <a:solidFill>
+                  <a:schemeClr val="accent1">
+                    <a:lumMod val="75000"/>
+                  </a:schemeClr>
+                </a:solidFill>
+                <a:latin typeface="Times New Roman" panose="02020603050405020304" pitchFamily="18" charset="0"/>
+                <a:cs typeface="Times New Roman" panose="02020603050405020304" pitchFamily="18" charset="0"/>
+              </a:rPr>
+              <a:t>Flow Chart</a:t>
+            </a:r>
+          </a:p>
+        </p:txBody>
+      </p:sp>
+      <p:sp>
+        <p:nvSpPr>
+          <p:cNvPr id="3" name="Content Placeholder 2">
+            <a:extLst>
+              <a:ext uri="{FF2B5EF4-FFF2-40B4-BE49-F238E27FC236}">
+                <a16:creationId xmlns:a16="http://schemas.microsoft.com/office/drawing/2014/main" id="{1975CCD3-A117-4C76-F635-F31538082751}"/>
+              </a:ext>
+            </a:extLst>
+          </p:cNvPr>
+          <p:cNvSpPr>
+            <a:spLocks noGrp="1"/>
+          </p:cNvSpPr>
+          <p:nvPr>
+            <p:ph idx="1"/>
+          </p:nvPr>
+        </p:nvSpPr>
+        <p:spPr>
+          <a:xfrm>
+            <a:off x="2444310" y="6364441"/>
+            <a:ext cx="8073390" cy="365125"/>
+          </a:xfrm>
+        </p:spPr>
+        <p:txBody>
+          <a:bodyPr>
+            <a:normAutofit/>
+          </a:bodyPr>
+          <a:lstStyle/>
+          <a:p>
+            <a:pPr marL="0" indent="0">
+              <a:buNone/>
+            </a:pPr>
+            <a:r>
+              <a:rPr lang="en-US" sz="1800" b="1" dirty="0">
+                <a:latin typeface="Times New Roman" panose="02020603050405020304" pitchFamily="18" charset="0"/>
+                <a:cs typeface="Times New Roman" panose="02020603050405020304" pitchFamily="18" charset="0"/>
+              </a:rPr>
+              <a:t>Figure: The system flow diagram of Web-Based Automatic timetable scheduler</a:t>
+            </a:r>
+            <a:endParaRPr lang="en-IN" sz="1800" dirty="0">
+              <a:latin typeface="Times New Roman" panose="02020603050405020304" pitchFamily="18" charset="0"/>
+              <a:cs typeface="Times New Roman" panose="02020603050405020304" pitchFamily="18" charset="0"/>
+            </a:endParaRPr>
+          </a:p>
+        </p:txBody>
+      </p:sp>
+      <p:sp>
+        <p:nvSpPr>
+          <p:cNvPr id="8" name="Slide Number Placeholder 7">
+            <a:extLst>
+              <a:ext uri="{FF2B5EF4-FFF2-40B4-BE49-F238E27FC236}">
+                <a16:creationId xmlns:a16="http://schemas.microsoft.com/office/drawing/2014/main" id="{5B431902-F7F1-B6CA-C2B3-0EFECA70F7EC}"/>
               </a:ext>
             </a:extLst>
           </p:cNvPr>
@@ -6618,123 +7861,12 @@
           </a:p>
         </p:txBody>
       </p:sp>
-      <p:sp>
-        <p:nvSpPr>
-          <p:cNvPr id="7" name="Title 1">
+      <p:pic>
+        <p:nvPicPr>
+          <p:cNvPr id="7" name="Picture 6">
             <a:extLst>
               <a:ext uri="{FF2B5EF4-FFF2-40B4-BE49-F238E27FC236}">
-                <a16:creationId xmlns:a16="http://schemas.microsoft.com/office/drawing/2014/main" id="{21A81E5F-386B-8A3E-A1CE-F413802A21FF}"/>
-              </a:ext>
-            </a:extLst>
-          </p:cNvPr>
-          <p:cNvSpPr>
-            <a:spLocks noGrp="1"/>
-          </p:cNvSpPr>
-          <p:nvPr>
-            <p:ph type="title"/>
-          </p:nvPr>
-        </p:nvSpPr>
-        <p:spPr>
-          <a:xfrm>
-            <a:off x="558664" y="-117988"/>
-            <a:ext cx="10515600" cy="1325563"/>
-          </a:xfrm>
-        </p:spPr>
-        <p:txBody>
-          <a:bodyPr/>
-          <a:lstStyle/>
-          <a:p>
-            <a:pPr marL="571500" indent="-571500">
-              <a:buFont typeface="Wingdings" panose="05000000000000000000" pitchFamily="2" charset="2"/>
-              <a:buChar char="Ø"/>
-            </a:pPr>
-            <a:r>
-              <a:rPr lang="en-US" dirty="0">
-                <a:solidFill>
-                  <a:schemeClr val="accent1">
-                    <a:lumMod val="75000"/>
-                  </a:schemeClr>
-                </a:solidFill>
-                <a:latin typeface="Times New Roman" panose="02020603050405020304" pitchFamily="18" charset="0"/>
-                <a:cs typeface="Times New Roman" panose="02020603050405020304" pitchFamily="18" charset="0"/>
-              </a:rPr>
-              <a:t>A</a:t>
-            </a:r>
-            <a:r>
-              <a:rPr lang="en-IN" dirty="0" err="1">
-                <a:solidFill>
-                  <a:schemeClr val="accent1">
-                    <a:lumMod val="75000"/>
-                  </a:schemeClr>
-                </a:solidFill>
-                <a:latin typeface="Times New Roman" panose="02020603050405020304" pitchFamily="18" charset="0"/>
-                <a:cs typeface="Times New Roman" panose="02020603050405020304" pitchFamily="18" charset="0"/>
-              </a:rPr>
-              <a:t>ctivity</a:t>
-            </a:r>
-            <a:r>
-              <a:rPr lang="en-IN" dirty="0">
-                <a:solidFill>
-                  <a:schemeClr val="accent1">
-                    <a:lumMod val="75000"/>
-                  </a:schemeClr>
-                </a:solidFill>
-                <a:latin typeface="Times New Roman" panose="02020603050405020304" pitchFamily="18" charset="0"/>
-                <a:cs typeface="Times New Roman" panose="02020603050405020304" pitchFamily="18" charset="0"/>
-              </a:rPr>
-              <a:t> Diagram</a:t>
-            </a:r>
-          </a:p>
-        </p:txBody>
-      </p:sp>
-      <p:sp>
-        <p:nvSpPr>
-          <p:cNvPr id="2" name="TextBox 1">
-            <a:extLst>
-              <a:ext uri="{FF2B5EF4-FFF2-40B4-BE49-F238E27FC236}">
-                <a16:creationId xmlns:a16="http://schemas.microsoft.com/office/drawing/2014/main" id="{D7F7A8C7-3117-7309-CED2-E96CD391F6E8}"/>
-              </a:ext>
-            </a:extLst>
-          </p:cNvPr>
-          <p:cNvSpPr txBox="1"/>
-          <p:nvPr/>
-        </p:nvSpPr>
-        <p:spPr>
-          <a:xfrm>
-            <a:off x="1789471" y="6076420"/>
-            <a:ext cx="8622890" cy="646331"/>
-          </a:xfrm>
-          <a:prstGeom prst="rect">
-            <a:avLst/>
-          </a:prstGeom>
-          <a:noFill/>
-        </p:spPr>
-        <p:txBody>
-          <a:bodyPr wrap="square" rtlCol="0">
-            <a:spAutoFit/>
-          </a:bodyPr>
-          <a:lstStyle/>
-          <a:p>
-            <a:r>
-              <a:rPr lang="en-US" b="1" dirty="0">
-                <a:latin typeface="Times New Roman" panose="02020603050405020304" pitchFamily="18" charset="0"/>
-                <a:cs typeface="Times New Roman" panose="02020603050405020304" pitchFamily="18" charset="0"/>
-              </a:rPr>
-              <a:t>Figure : The activity diagram provides a detailed workflow of the web-based timetable scheduling system, focusing on user interactions and system functions.</a:t>
-            </a:r>
-            <a:endParaRPr lang="en-IN" b="1" dirty="0">
-              <a:latin typeface="Times New Roman" panose="02020603050405020304" pitchFamily="18" charset="0"/>
-              <a:cs typeface="Times New Roman" panose="02020603050405020304" pitchFamily="18" charset="0"/>
-            </a:endParaRPr>
-          </a:p>
-        </p:txBody>
-      </p:sp>
-      <p:pic>
-        <p:nvPicPr>
-          <p:cNvPr id="5" name="Picture 4">
-            <a:extLst>
-              <a:ext uri="{FF2B5EF4-FFF2-40B4-BE49-F238E27FC236}">
-                <a16:creationId xmlns:a16="http://schemas.microsoft.com/office/drawing/2014/main" id="{7FA38914-AC0C-F6DC-332E-B9AEFD9AE30B}"/>
+                <a16:creationId xmlns:a16="http://schemas.microsoft.com/office/drawing/2014/main" id="{488800AD-2A69-1D41-101B-F5DFE541AB83}"/>
               </a:ext>
             </a:extLst>
           </p:cNvPr>
@@ -6757,8 +7889,8 @@
         </p:blipFill>
         <p:spPr>
           <a:xfrm>
-            <a:off x="3858803" y="923575"/>
-            <a:ext cx="3915321" cy="5010849"/>
+            <a:off x="4155254" y="327202"/>
+            <a:ext cx="4651503" cy="5953018"/>
           </a:xfrm>
           <a:prstGeom prst="rect">
             <a:avLst/>
@@ -6773,7 +7905,7 @@
     </p:spTree>
     <p:extLst>
       <p:ext uri="{BB962C8B-B14F-4D97-AF65-F5344CB8AC3E}">
-        <p14:creationId xmlns:p14="http://schemas.microsoft.com/office/powerpoint/2010/main" val="1150949483"/>
+        <p14:creationId xmlns:p14="http://schemas.microsoft.com/office/powerpoint/2010/main" val="2635137703"/>
       </p:ext>
     </p:extLst>
   </p:cSld>
@@ -6802,104 +7934,10 @@
       </p:grpSpPr>
       <p:sp>
         <p:nvSpPr>
-          <p:cNvPr id="2" name="Title 1">
+          <p:cNvPr id="4" name="Slide Number Placeholder 3">
             <a:extLst>
               <a:ext uri="{FF2B5EF4-FFF2-40B4-BE49-F238E27FC236}">
-                <a16:creationId xmlns:a16="http://schemas.microsoft.com/office/drawing/2014/main" id="{E2C68626-3BE7-4580-F05D-866CB54DE4AC}"/>
-              </a:ext>
-            </a:extLst>
-          </p:cNvPr>
-          <p:cNvSpPr>
-            <a:spLocks noGrp="1"/>
-          </p:cNvSpPr>
-          <p:nvPr>
-            <p:ph type="title"/>
-          </p:nvPr>
-        </p:nvSpPr>
-        <p:spPr>
-          <a:xfrm>
-            <a:off x="548833" y="399849"/>
-            <a:ext cx="10515600" cy="1325563"/>
-          </a:xfrm>
-        </p:spPr>
-        <p:txBody>
-          <a:bodyPr/>
-          <a:lstStyle/>
-          <a:p>
-            <a:pPr marL="571500" indent="-571500">
-              <a:buFont typeface="Wingdings" panose="05000000000000000000" pitchFamily="2" charset="2"/>
-              <a:buChar char="Ø"/>
-            </a:pPr>
-            <a:r>
-              <a:rPr lang="en-IN" dirty="0">
-                <a:solidFill>
-                  <a:schemeClr val="accent1">
-                    <a:lumMod val="75000"/>
-                  </a:schemeClr>
-                </a:solidFill>
-                <a:latin typeface="Times New Roman" panose="02020603050405020304" pitchFamily="18" charset="0"/>
-                <a:cs typeface="Times New Roman" panose="02020603050405020304" pitchFamily="18" charset="0"/>
-              </a:rPr>
-              <a:t>Conclusion</a:t>
-            </a:r>
-          </a:p>
-        </p:txBody>
-      </p:sp>
-      <p:sp>
-        <p:nvSpPr>
-          <p:cNvPr id="3" name="Content Placeholder 2">
-            <a:extLst>
-              <a:ext uri="{FF2B5EF4-FFF2-40B4-BE49-F238E27FC236}">
-                <a16:creationId xmlns:a16="http://schemas.microsoft.com/office/drawing/2014/main" id="{D8046ABC-16CE-210D-17D4-7F4327520C78}"/>
-              </a:ext>
-            </a:extLst>
-          </p:cNvPr>
-          <p:cNvSpPr>
-            <a:spLocks noGrp="1"/>
-          </p:cNvSpPr>
-          <p:nvPr>
-            <p:ph idx="1"/>
-          </p:nvPr>
-        </p:nvSpPr>
-        <p:spPr>
-          <a:xfrm>
-            <a:off x="329381" y="1725412"/>
-            <a:ext cx="11533238" cy="3759098"/>
-          </a:xfrm>
-        </p:spPr>
-        <p:txBody>
-          <a:bodyPr>
-            <a:normAutofit/>
-          </a:bodyPr>
-          <a:lstStyle/>
-          <a:p>
-            <a:pPr algn="just"/>
-            <a:r>
-              <a:rPr lang="en-US" sz="2400" dirty="0">
-                <a:latin typeface="Times New Roman" panose="02020603050405020304" pitchFamily="18" charset="0"/>
-                <a:cs typeface="Times New Roman" panose="02020603050405020304" pitchFamily="18" charset="0"/>
-              </a:rPr>
-              <a:t>As discussed, an evolutionary algorithm, genetics algorithm for time tabling has been proposed. The intention of the algorithm to generate a time-table schedule automatically is satisfied. The algorithm incorporates a number of techniques, aimed to improve the efficiency of the search operation. By automating this process with the help of computer assistance timetable generator can save a lot of precious time of administrators who are involved in creating and managing various timetables of the institute.</a:t>
-            </a:r>
-          </a:p>
-          <a:p>
-            <a:pPr algn="just"/>
-            <a:r>
-              <a:rPr lang="en-US" sz="2400" dirty="0">
-                <a:latin typeface="Times New Roman" panose="02020603050405020304" pitchFamily="18" charset="0"/>
-                <a:cs typeface="Times New Roman" panose="02020603050405020304" pitchFamily="18" charset="0"/>
-              </a:rPr>
-              <a:t>This reduces time consumption and the error in framing the timetable manually. The benefits of this approach are simplified design and reduced development time. </a:t>
-            </a:r>
-          </a:p>
-        </p:txBody>
-      </p:sp>
-      <p:sp>
-        <p:nvSpPr>
-          <p:cNvPr id="8" name="Slide Number Placeholder 7">
-            <a:extLst>
-              <a:ext uri="{FF2B5EF4-FFF2-40B4-BE49-F238E27FC236}">
-                <a16:creationId xmlns:a16="http://schemas.microsoft.com/office/drawing/2014/main" id="{BB230758-FB0A-8344-3307-F9D313073EE3}"/>
+                <a16:creationId xmlns:a16="http://schemas.microsoft.com/office/drawing/2014/main" id="{C708CAEA-E1CA-D7A9-8DB5-7DB344C8DAAB}"/>
               </a:ext>
             </a:extLst>
           </p:cNvPr>
@@ -6923,10 +7961,93 @@
           </a:p>
         </p:txBody>
       </p:sp>
+      <p:sp>
+        <p:nvSpPr>
+          <p:cNvPr id="2" name="TextBox 1">
+            <a:extLst>
+              <a:ext uri="{FF2B5EF4-FFF2-40B4-BE49-F238E27FC236}">
+                <a16:creationId xmlns:a16="http://schemas.microsoft.com/office/drawing/2014/main" id="{D7F7A8C7-3117-7309-CED2-E96CD391F6E8}"/>
+              </a:ext>
+            </a:extLst>
+          </p:cNvPr>
+          <p:cNvSpPr txBox="1"/>
+          <p:nvPr/>
+        </p:nvSpPr>
+        <p:spPr>
+          <a:xfrm>
+            <a:off x="267261" y="6273225"/>
+            <a:ext cx="11917345" cy="584775"/>
+          </a:xfrm>
+          <a:prstGeom prst="rect">
+            <a:avLst/>
+          </a:prstGeom>
+          <a:noFill/>
+        </p:spPr>
+        <p:txBody>
+          <a:bodyPr wrap="square" rtlCol="0">
+            <a:spAutoFit/>
+          </a:bodyPr>
+          <a:lstStyle/>
+          <a:p>
+            <a:r>
+              <a:rPr lang="en-US" sz="1600" b="1" dirty="0">
+                <a:latin typeface="Times New Roman" panose="02020603050405020304" pitchFamily="18" charset="0"/>
+                <a:cs typeface="Times New Roman" panose="02020603050405020304" pitchFamily="18" charset="0"/>
+              </a:rPr>
+              <a:t>Figure : The activity diagram provides a detailed workflow of the web-based timetable scheduling system, focusing on user interactions and system functions.</a:t>
+            </a:r>
+            <a:endParaRPr lang="en-IN" sz="1600" b="1" dirty="0">
+              <a:latin typeface="Times New Roman" panose="02020603050405020304" pitchFamily="18" charset="0"/>
+              <a:cs typeface="Times New Roman" panose="02020603050405020304" pitchFamily="18" charset="0"/>
+            </a:endParaRPr>
+          </a:p>
+        </p:txBody>
+      </p:sp>
+      <p:pic>
+        <p:nvPicPr>
+          <p:cNvPr id="9" name="Picture 8">
+            <a:extLst>
+              <a:ext uri="{FF2B5EF4-FFF2-40B4-BE49-F238E27FC236}">
+                <a16:creationId xmlns:a16="http://schemas.microsoft.com/office/drawing/2014/main" id="{5A6898D3-59EA-B063-3A7F-036683E121AB}"/>
+              </a:ext>
+            </a:extLst>
+          </p:cNvPr>
+          <p:cNvPicPr>
+            <a:picLocks noChangeAspect="1"/>
+          </p:cNvPicPr>
+          <p:nvPr/>
+        </p:nvPicPr>
+        <p:blipFill>
+          <a:blip r:embed="rId2">
+            <a:extLst>
+              <a:ext uri="{28A0092B-C50C-407E-A947-70E740481C1C}">
+                <a14:useLocalDpi xmlns:a14="http://schemas.microsoft.com/office/drawing/2010/main" val="0"/>
+              </a:ext>
+            </a:extLst>
+          </a:blip>
+          <a:stretch>
+            <a:fillRect/>
+          </a:stretch>
+        </p:blipFill>
+        <p:spPr>
+          <a:xfrm>
+            <a:off x="2446285" y="331824"/>
+            <a:ext cx="7118559" cy="5941401"/>
+          </a:xfrm>
+          <a:prstGeom prst="rect">
+            <a:avLst/>
+          </a:prstGeom>
+          <a:ln>
+            <a:solidFill>
+              <a:schemeClr val="tx1"/>
+            </a:solidFill>
+          </a:ln>
+        </p:spPr>
+      </p:pic>
     </p:spTree>
     <p:extLst>
       <p:ext uri="{BB962C8B-B14F-4D97-AF65-F5344CB8AC3E}">
-        <p14:creationId xmlns:p14="http://schemas.microsoft.com/office/powerpoint/2010/main" val="1025537525"/>
+        <p14:creationId xmlns:p14="http://schemas.microsoft.com/office/powerpoint/2010/main" val="1150949483"/>
       </p:ext>
     </p:extLst>
   </p:cSld>
